--- a/public/lessons/year-6-maths/autumn/week-5/identify-common-factors/teaching-powerpoint-v1.pptx
+++ b/public/lessons/year-6-maths/autumn/week-5/identify-common-factors/teaching-powerpoint-v1.pptx
@@ -2,24 +2,24 @@
 <file path=ppt/presentation.xml><?xml version="1.0" encoding="utf-8"?>
 <p:presentation xmlns:p="http://schemas.openxmlformats.org/presentationml/2006/main">
   <p:sldMasterIdLst>
-    <p:sldMasterId xmlns:r="http://schemas.openxmlformats.org/officeDocument/2006/relationships" id="2147483648" r:id="R672103e329bd44af"/>
+    <p:sldMasterId xmlns:r="http://schemas.openxmlformats.org/officeDocument/2006/relationships" id="2147483648" r:id="Rc2ee550e80524a31"/>
   </p:sldMasterIdLst>
   <p:notesMasterIdLst>
-    <p:notesMasterId xmlns:r="http://schemas.openxmlformats.org/officeDocument/2006/relationships" r:id="R3001a8e533b245d2"/>
+    <p:notesMasterId xmlns:r="http://schemas.openxmlformats.org/officeDocument/2006/relationships" r:id="R891bd8e313704d37"/>
   </p:notesMasterIdLst>
   <p:sldIdLst>
-    <p:sldId xmlns:r="http://schemas.openxmlformats.org/officeDocument/2006/relationships" id="256" r:id="R37b08005ba434018"/>
-    <p:sldId xmlns:r="http://schemas.openxmlformats.org/officeDocument/2006/relationships" id="257" r:id="R7038cc5bf6234360"/>
-    <p:sldId xmlns:r="http://schemas.openxmlformats.org/officeDocument/2006/relationships" id="258" r:id="R387b915c691d4459"/>
-    <p:sldId xmlns:r="http://schemas.openxmlformats.org/officeDocument/2006/relationships" id="259" r:id="Rf2939a8685d34780"/>
-    <p:sldId xmlns:r="http://schemas.openxmlformats.org/officeDocument/2006/relationships" id="260" r:id="R1a6df3f181d04a9b"/>
-    <p:sldId xmlns:r="http://schemas.openxmlformats.org/officeDocument/2006/relationships" id="261" r:id="R1c3bd54e801c4f86"/>
-    <p:sldId xmlns:r="http://schemas.openxmlformats.org/officeDocument/2006/relationships" id="262" r:id="Rc2df7aa5cc9145fc"/>
-    <p:sldId xmlns:r="http://schemas.openxmlformats.org/officeDocument/2006/relationships" id="263" r:id="Re65a08eb2442463d"/>
-    <p:sldId xmlns:r="http://schemas.openxmlformats.org/officeDocument/2006/relationships" id="264" r:id="Rec45c740935943a5"/>
-    <p:sldId xmlns:r="http://schemas.openxmlformats.org/officeDocument/2006/relationships" id="265" r:id="Rd97ea3c6c89b48f6"/>
-    <p:sldId xmlns:r="http://schemas.openxmlformats.org/officeDocument/2006/relationships" id="266" r:id="Re2269a9dd23a415e"/>
-    <p:sldId xmlns:r="http://schemas.openxmlformats.org/officeDocument/2006/relationships" id="267" r:id="R28db1ec6ece246b7"/>
+    <p:sldId xmlns:r="http://schemas.openxmlformats.org/officeDocument/2006/relationships" id="256" r:id="Ra64b8818e009496c"/>
+    <p:sldId xmlns:r="http://schemas.openxmlformats.org/officeDocument/2006/relationships" id="257" r:id="Rb6264fac281345e4"/>
+    <p:sldId xmlns:r="http://schemas.openxmlformats.org/officeDocument/2006/relationships" id="258" r:id="R13735cb2773b4542"/>
+    <p:sldId xmlns:r="http://schemas.openxmlformats.org/officeDocument/2006/relationships" id="259" r:id="Rd2ae021016174727"/>
+    <p:sldId xmlns:r="http://schemas.openxmlformats.org/officeDocument/2006/relationships" id="260" r:id="R9cadf59357dc42fd"/>
+    <p:sldId xmlns:r="http://schemas.openxmlformats.org/officeDocument/2006/relationships" id="261" r:id="R9257dc02d3e74293"/>
+    <p:sldId xmlns:r="http://schemas.openxmlformats.org/officeDocument/2006/relationships" id="262" r:id="Re2152f289dd54e81"/>
+    <p:sldId xmlns:r="http://schemas.openxmlformats.org/officeDocument/2006/relationships" id="263" r:id="R17a386be3bab43eb"/>
+    <p:sldId xmlns:r="http://schemas.openxmlformats.org/officeDocument/2006/relationships" id="264" r:id="R97d98a269de14541"/>
+    <p:sldId xmlns:r="http://schemas.openxmlformats.org/officeDocument/2006/relationships" id="265" r:id="R9b5ca9f8d6cc4287"/>
+    <p:sldId xmlns:r="http://schemas.openxmlformats.org/officeDocument/2006/relationships" id="266" r:id="R057660cb31f640c0"/>
+    <p:sldId xmlns:r="http://schemas.openxmlformats.org/officeDocument/2006/relationships" id="267" r:id="R16bb8cbf13764fb9"/>
   </p:sldIdLst>
   <p:sldSz cx="12192000" cy="6858000"/>
   <p:notesSz cx="6858000" cy="9144000"/>
@@ -873,7 +873,7 @@
           <a:lstStyle xmlns:a="http://schemas.openxmlformats.org/drawingml/2006/main"/>
           <a:p xmlns:a="http://schemas.openxmlformats.org/drawingml/2006/main">
             <a:r>
-              <a:t>I do. Reveal the question, setup and each calculation stage one click at a time. Pupils watch before copying. Model answer: 42.</a:t>
+              <a:t>I do. Reveal the question, then reveal each mathematical change one click at a time. Point to the numbers and operation that changed before moving to the next line. Final answer: 42.</a:t>
             </a:r>
           </a:p>
         </p:txBody>
@@ -1291,7 +1291,7 @@
   </p:cSld>
   <p:clrMap bg1="lt1" tx1="dk1" bg2="lt2" tx2="dk2" accent1="accent1" accent2="accent2" accent3="accent3" accent4="accent4" accent5="accent5" accent6="accent6" hlink="hlink" folHlink="folHlink"/>
   <p:sldLayoutIdLst>
-    <p:sldLayoutId xmlns:r="http://schemas.openxmlformats.org/officeDocument/2006/relationships" id="2147483649" r:id="R6e1ac2ee12d64b79"/>
+    <p:sldLayoutId xmlns:r="http://schemas.openxmlformats.org/officeDocument/2006/relationships" id="2147483649" r:id="R7158b9d1b7d344e9"/>
   </p:sldLayoutIdLst>
   <p:txStyles>
     <p:titleStyle>
@@ -1842,7 +1842,7 @@
           <p:cNvPr id="12" name="">
             <a:extLst xmlns:a="http://schemas.openxmlformats.org/drawingml/2006/main">
               <a:ext uri="{FF2B5EF4-FFF2-40B4-BE49-F238E27FC236}">
-                <a16:creationId xmlns:a16="http://schemas.microsoft.com/office/drawing/2014/main" id="{DB483F6F-6759-4BCA-8BA0-F52F484B8DB7}"/>
+                <a16:creationId xmlns:a16="http://schemas.microsoft.com/office/drawing/2014/main" id="{3ACD4EDA-4C64-444F-BD50-CDED0F0B0741}"/>
               </a:ext>
             </a:extLst>
           </p:cNvPr>
@@ -1874,7 +1874,7 @@
           <p:cNvPr id="2" name="">
             <a:extLst xmlns:a="http://schemas.openxmlformats.org/drawingml/2006/main">
               <a:ext uri="{FF2B5EF4-FFF2-40B4-BE49-F238E27FC236}">
-                <a16:creationId xmlns:a16="http://schemas.microsoft.com/office/drawing/2014/main" id="{15764731-9CB2-4263-9BC1-2AB3F49DB5FA}"/>
+                <a16:creationId xmlns:a16="http://schemas.microsoft.com/office/drawing/2014/main" id="{340F65F2-1F80-4706-ACAC-C1F278622B67}"/>
               </a:ext>
             </a:extLst>
           </p:cNvPr>
@@ -1931,7 +1931,7 @@
           <p:cNvPr id="3" name="">
             <a:extLst xmlns:a="http://schemas.openxmlformats.org/drawingml/2006/main">
               <a:ext uri="{FF2B5EF4-FFF2-40B4-BE49-F238E27FC236}">
-                <a16:creationId xmlns:a16="http://schemas.microsoft.com/office/drawing/2014/main" id="{413F3ADC-E29D-42E4-BC4E-E2A8BBB5EFE6}"/>
+                <a16:creationId xmlns:a16="http://schemas.microsoft.com/office/drawing/2014/main" id="{0E31E483-014A-49DF-83B0-B7D8F45C275B}"/>
               </a:ext>
             </a:extLst>
           </p:cNvPr>
@@ -1965,7 +1965,7 @@
           <p:cNvPr id="4" name="">
             <a:extLst xmlns:a="http://schemas.openxmlformats.org/drawingml/2006/main">
               <a:ext uri="{FF2B5EF4-FFF2-40B4-BE49-F238E27FC236}">
-                <a16:creationId xmlns:a16="http://schemas.microsoft.com/office/drawing/2014/main" id="{F031D151-6E71-432F-BBA6-586BC01C345E}"/>
+                <a16:creationId xmlns:a16="http://schemas.microsoft.com/office/drawing/2014/main" id="{A11F6923-855B-4F02-91D6-5B0E723BEB19}"/>
               </a:ext>
             </a:extLst>
           </p:cNvPr>
@@ -2022,7 +2022,7 @@
           <p:cNvPr id="5" name="">
             <a:extLst xmlns:a="http://schemas.openxmlformats.org/drawingml/2006/main">
               <a:ext uri="{FF2B5EF4-FFF2-40B4-BE49-F238E27FC236}">
-                <a16:creationId xmlns:a16="http://schemas.microsoft.com/office/drawing/2014/main" id="{389F5B84-1CE4-4E3A-A60F-52001CFFDE12}"/>
+                <a16:creationId xmlns:a16="http://schemas.microsoft.com/office/drawing/2014/main" id="{2FBA86B9-BD17-4644-830D-1A095AAB92E4}"/>
               </a:ext>
             </a:extLst>
           </p:cNvPr>
@@ -2079,7 +2079,7 @@
           <p:cNvPr id="6" name="">
             <a:extLst xmlns:a="http://schemas.openxmlformats.org/drawingml/2006/main">
               <a:ext uri="{FF2B5EF4-FFF2-40B4-BE49-F238E27FC236}">
-                <a16:creationId xmlns:a16="http://schemas.microsoft.com/office/drawing/2014/main" id="{1D6C36CD-AD2C-44BF-82BF-691CBC47AA01}"/>
+                <a16:creationId xmlns:a16="http://schemas.microsoft.com/office/drawing/2014/main" id="{553F66B0-BBD6-4B6E-B4EA-75A30C544E7B}"/>
               </a:ext>
             </a:extLst>
           </p:cNvPr>
@@ -2113,7 +2113,7 @@
           <p:cNvPr id="7" name="">
             <a:extLst xmlns:a="http://schemas.openxmlformats.org/drawingml/2006/main">
               <a:ext uri="{FF2B5EF4-FFF2-40B4-BE49-F238E27FC236}">
-                <a16:creationId xmlns:a16="http://schemas.microsoft.com/office/drawing/2014/main" id="{DD75CE0C-2D93-483F-B360-5DFBC05491E1}"/>
+                <a16:creationId xmlns:a16="http://schemas.microsoft.com/office/drawing/2014/main" id="{7AC3F00D-6C91-421B-8DDA-4F083D9EE617}"/>
               </a:ext>
             </a:extLst>
           </p:cNvPr>
@@ -2170,7 +2170,7 @@
           <p:cNvPr id="8" name="">
             <a:extLst xmlns:a="http://schemas.openxmlformats.org/drawingml/2006/main">
               <a:ext uri="{FF2B5EF4-FFF2-40B4-BE49-F238E27FC236}">
-                <a16:creationId xmlns:a16="http://schemas.microsoft.com/office/drawing/2014/main" id="{5FA6D53E-8347-4EDC-AF0C-90F6752CD652}"/>
+                <a16:creationId xmlns:a16="http://schemas.microsoft.com/office/drawing/2014/main" id="{7DCA0595-F112-4180-8DFB-C8EE0300F72F}"/>
               </a:ext>
             </a:extLst>
           </p:cNvPr>
@@ -2227,7 +2227,7 @@
           <p:cNvPr id="9" name="">
             <a:extLst xmlns:a="http://schemas.openxmlformats.org/drawingml/2006/main">
               <a:ext uri="{FF2B5EF4-FFF2-40B4-BE49-F238E27FC236}">
-                <a16:creationId xmlns:a16="http://schemas.microsoft.com/office/drawing/2014/main" id="{B359E8EC-9B3D-4F46-85A4-EED6DA36D428}"/>
+                <a16:creationId xmlns:a16="http://schemas.microsoft.com/office/drawing/2014/main" id="{38A90DD9-1E03-4450-908D-B58D372C4D15}"/>
               </a:ext>
             </a:extLst>
           </p:cNvPr>
@@ -2284,7 +2284,7 @@
           <p:cNvPr id="10" name="">
             <a:extLst xmlns:a="http://schemas.openxmlformats.org/drawingml/2006/main">
               <a:ext uri="{FF2B5EF4-FFF2-40B4-BE49-F238E27FC236}">
-                <a16:creationId xmlns:a16="http://schemas.microsoft.com/office/drawing/2014/main" id="{66924C1F-DCB5-41FC-893D-1887746B2DBA}"/>
+                <a16:creationId xmlns:a16="http://schemas.microsoft.com/office/drawing/2014/main" id="{57EAB1C6-FBFB-4A2E-BCAB-B1594C538240}"/>
               </a:ext>
             </a:extLst>
           </p:cNvPr>
@@ -2341,7 +2341,7 @@
           <p:cNvPr id="11" name="">
             <a:extLst xmlns:a="http://schemas.openxmlformats.org/drawingml/2006/main">
               <a:ext uri="{FF2B5EF4-FFF2-40B4-BE49-F238E27FC236}">
-                <a16:creationId xmlns:a16="http://schemas.microsoft.com/office/drawing/2014/main" id="{3EB9F46F-DDDE-414D-A2C1-A7022108330C}"/>
+                <a16:creationId xmlns:a16="http://schemas.microsoft.com/office/drawing/2014/main" id="{60845666-D4E4-4E46-B958-C84B573D3AAE}"/>
               </a:ext>
             </a:extLst>
           </p:cNvPr>
@@ -2396,7 +2396,7 @@
     </p:spTree>
     <p:extLst>
       <p:ext uri="{BB962C8B-B14F-4D97-AF65-F5344CB8AC3E}">
-        <p14:creationId xmlns:p14="http://schemas.microsoft.com/office/powerpoint/2010/main" val="1144174809"/>
+        <p14:creationId xmlns:p14="http://schemas.microsoft.com/office/powerpoint/2010/main" val="330311999"/>
       </p:ext>
     </p:extLst>
   </p:cSld>
@@ -2427,7 +2427,7 @@
           <p:cNvPr id="14" name="">
             <a:extLst xmlns:a="http://schemas.openxmlformats.org/drawingml/2006/main">
               <a:ext uri="{FF2B5EF4-FFF2-40B4-BE49-F238E27FC236}">
-                <a16:creationId xmlns:a16="http://schemas.microsoft.com/office/drawing/2014/main" id="{EBCF4344-37D4-4DA0-BC2E-EF067FE322A9}"/>
+                <a16:creationId xmlns:a16="http://schemas.microsoft.com/office/drawing/2014/main" id="{A5922BB9-F94F-49E3-97F2-B142B831F076}"/>
               </a:ext>
             </a:extLst>
           </p:cNvPr>
@@ -2459,7 +2459,7 @@
           <p:cNvPr id="2" name="">
             <a:extLst xmlns:a="http://schemas.openxmlformats.org/drawingml/2006/main">
               <a:ext uri="{FF2B5EF4-FFF2-40B4-BE49-F238E27FC236}">
-                <a16:creationId xmlns:a16="http://schemas.microsoft.com/office/drawing/2014/main" id="{D53D671F-5934-480F-8F5B-AAB33A678AE6}"/>
+                <a16:creationId xmlns:a16="http://schemas.microsoft.com/office/drawing/2014/main" id="{75F87238-DB4F-4769-A97F-FEA42827BE6D}"/>
               </a:ext>
             </a:extLst>
           </p:cNvPr>
@@ -2516,7 +2516,7 @@
           <p:cNvPr id="3" name="">
             <a:extLst xmlns:a="http://schemas.openxmlformats.org/drawingml/2006/main">
               <a:ext uri="{FF2B5EF4-FFF2-40B4-BE49-F238E27FC236}">
-                <a16:creationId xmlns:a16="http://schemas.microsoft.com/office/drawing/2014/main" id="{B1A944D4-E65E-4780-91D8-11C350BE8CDB}"/>
+                <a16:creationId xmlns:a16="http://schemas.microsoft.com/office/drawing/2014/main" id="{A5C8F536-B2C0-4BAA-ADDE-1BD06C84C7A2}"/>
               </a:ext>
             </a:extLst>
           </p:cNvPr>
@@ -2548,7 +2548,7 @@
           <p:cNvPr id="4" name="">
             <a:extLst xmlns:a="http://schemas.openxmlformats.org/drawingml/2006/main">
               <a:ext uri="{FF2B5EF4-FFF2-40B4-BE49-F238E27FC236}">
-                <a16:creationId xmlns:a16="http://schemas.microsoft.com/office/drawing/2014/main" id="{5F37D9DA-191C-4B59-BD52-B0D84539F20B}"/>
+                <a16:creationId xmlns:a16="http://schemas.microsoft.com/office/drawing/2014/main" id="{296037BF-7720-4428-B877-6169D46A5B55}"/>
               </a:ext>
             </a:extLst>
           </p:cNvPr>
@@ -2605,7 +2605,7 @@
           <p:cNvPr id="5" name="">
             <a:extLst xmlns:a="http://schemas.openxmlformats.org/drawingml/2006/main">
               <a:ext uri="{FF2B5EF4-FFF2-40B4-BE49-F238E27FC236}">
-                <a16:creationId xmlns:a16="http://schemas.microsoft.com/office/drawing/2014/main" id="{1EB84074-4AB6-46DD-A73A-69533013FAB6}"/>
+                <a16:creationId xmlns:a16="http://schemas.microsoft.com/office/drawing/2014/main" id="{DEF09C7F-EBD0-4047-9BE8-26AD1EBB6445}"/>
               </a:ext>
             </a:extLst>
           </p:cNvPr>
@@ -2662,7 +2662,7 @@
           <p:cNvPr id="6" name="">
             <a:extLst xmlns:a="http://schemas.openxmlformats.org/drawingml/2006/main">
               <a:ext uri="{FF2B5EF4-FFF2-40B4-BE49-F238E27FC236}">
-                <a16:creationId xmlns:a16="http://schemas.microsoft.com/office/drawing/2014/main" id="{82921F8E-4777-4392-A26F-5F20FA0500EF}"/>
+                <a16:creationId xmlns:a16="http://schemas.microsoft.com/office/drawing/2014/main" id="{8626E8BD-155E-45C6-BD01-A678E7C06731}"/>
               </a:ext>
             </a:extLst>
           </p:cNvPr>
@@ -2719,7 +2719,7 @@
           <p:cNvPr id="7" name="">
             <a:extLst xmlns:a="http://schemas.openxmlformats.org/drawingml/2006/main">
               <a:ext uri="{FF2B5EF4-FFF2-40B4-BE49-F238E27FC236}">
-                <a16:creationId xmlns:a16="http://schemas.microsoft.com/office/drawing/2014/main" id="{ECD76CD7-4CDB-4FF0-8292-6C437AD0D8DB}"/>
+                <a16:creationId xmlns:a16="http://schemas.microsoft.com/office/drawing/2014/main" id="{A2FA5F2A-4495-4025-B1CC-1921D4A3B93E}"/>
               </a:ext>
             </a:extLst>
           </p:cNvPr>
@@ -2751,7 +2751,7 @@
           <p:cNvPr id="8" name="">
             <a:extLst xmlns:a="http://schemas.openxmlformats.org/drawingml/2006/main">
               <a:ext uri="{FF2B5EF4-FFF2-40B4-BE49-F238E27FC236}">
-                <a16:creationId xmlns:a16="http://schemas.microsoft.com/office/drawing/2014/main" id="{229FE8F9-2A07-4CA7-B024-4F28F201AE41}"/>
+                <a16:creationId xmlns:a16="http://schemas.microsoft.com/office/drawing/2014/main" id="{B1815482-0515-4D9C-A33A-DB1A136C7DC4}"/>
               </a:ext>
             </a:extLst>
           </p:cNvPr>
@@ -2808,7 +2808,7 @@
           <p:cNvPr id="9" name="">
             <a:extLst xmlns:a="http://schemas.openxmlformats.org/drawingml/2006/main">
               <a:ext uri="{FF2B5EF4-FFF2-40B4-BE49-F238E27FC236}">
-                <a16:creationId xmlns:a16="http://schemas.microsoft.com/office/drawing/2014/main" id="{FFD7842C-980A-4ECB-983B-49767F42A809}"/>
+                <a16:creationId xmlns:a16="http://schemas.microsoft.com/office/drawing/2014/main" id="{0F88E54A-FD0D-40E4-9543-235D1BC82A27}"/>
               </a:ext>
             </a:extLst>
           </p:cNvPr>
@@ -2865,7 +2865,7 @@
           <p:cNvPr id="10" name="">
             <a:extLst xmlns:a="http://schemas.openxmlformats.org/drawingml/2006/main">
               <a:ext uri="{FF2B5EF4-FFF2-40B4-BE49-F238E27FC236}">
-                <a16:creationId xmlns:a16="http://schemas.microsoft.com/office/drawing/2014/main" id="{75049A15-4357-4FAB-B29A-9D31D29A7D14}"/>
+                <a16:creationId xmlns:a16="http://schemas.microsoft.com/office/drawing/2014/main" id="{910EC058-A618-4A13-B972-F8B75DF3B5D8}"/>
               </a:ext>
             </a:extLst>
           </p:cNvPr>
@@ -2922,7 +2922,7 @@
           <p:cNvPr id="11" name="">
             <a:extLst xmlns:a="http://schemas.openxmlformats.org/drawingml/2006/main">
               <a:ext uri="{FF2B5EF4-FFF2-40B4-BE49-F238E27FC236}">
-                <a16:creationId xmlns:a16="http://schemas.microsoft.com/office/drawing/2014/main" id="{327CC872-F1BD-416B-883D-815114818DDE}"/>
+                <a16:creationId xmlns:a16="http://schemas.microsoft.com/office/drawing/2014/main" id="{8C61B756-6FC3-447D-B9CE-DE920CF88107}"/>
               </a:ext>
             </a:extLst>
           </p:cNvPr>
@@ -2979,7 +2979,7 @@
           <p:cNvPr id="12" name="">
             <a:extLst xmlns:a="http://schemas.openxmlformats.org/drawingml/2006/main">
               <a:ext uri="{FF2B5EF4-FFF2-40B4-BE49-F238E27FC236}">
-                <a16:creationId xmlns:a16="http://schemas.microsoft.com/office/drawing/2014/main" id="{EB6E9B68-8BAE-472D-AA52-EA10E052A03B}"/>
+                <a16:creationId xmlns:a16="http://schemas.microsoft.com/office/drawing/2014/main" id="{0C36F06F-A16E-4256-B9D3-F6C4EA36C93D}"/>
               </a:ext>
             </a:extLst>
           </p:cNvPr>
@@ -3036,7 +3036,7 @@
           <p:cNvPr id="13" name="">
             <a:extLst xmlns:a="http://schemas.openxmlformats.org/drawingml/2006/main">
               <a:ext uri="{FF2B5EF4-FFF2-40B4-BE49-F238E27FC236}">
-                <a16:creationId xmlns:a16="http://schemas.microsoft.com/office/drawing/2014/main" id="{D1DB0C81-CAA9-4EBA-B46C-B872E059E707}"/>
+                <a16:creationId xmlns:a16="http://schemas.microsoft.com/office/drawing/2014/main" id="{31193CCC-1FAC-4993-A39C-E4811704EBD9}"/>
               </a:ext>
             </a:extLst>
           </p:cNvPr>
@@ -3091,7 +3091,7 @@
     </p:spTree>
     <p:extLst>
       <p:ext uri="{BB962C8B-B14F-4D97-AF65-F5344CB8AC3E}">
-        <p14:creationId xmlns:p14="http://schemas.microsoft.com/office/powerpoint/2010/main" val="455585650"/>
+        <p14:creationId xmlns:p14="http://schemas.microsoft.com/office/powerpoint/2010/main" val="974418295"/>
       </p:ext>
     </p:extLst>
   </p:cSld>
@@ -3292,7 +3292,7 @@
           <p:cNvPr id="19" name="">
             <a:extLst xmlns:a="http://schemas.openxmlformats.org/drawingml/2006/main">
               <a:ext uri="{FF2B5EF4-FFF2-40B4-BE49-F238E27FC236}">
-                <a16:creationId xmlns:a16="http://schemas.microsoft.com/office/drawing/2014/main" id="{2CC3D9AF-9589-45F1-926D-B84D4B5F6E89}"/>
+                <a16:creationId xmlns:a16="http://schemas.microsoft.com/office/drawing/2014/main" id="{31AA0FB9-5968-4370-8346-D9C762F5BE87}"/>
               </a:ext>
             </a:extLst>
           </p:cNvPr>
@@ -3324,7 +3324,7 @@
           <p:cNvPr id="2" name="">
             <a:extLst xmlns:a="http://schemas.openxmlformats.org/drawingml/2006/main">
               <a:ext uri="{FF2B5EF4-FFF2-40B4-BE49-F238E27FC236}">
-                <a16:creationId xmlns:a16="http://schemas.microsoft.com/office/drawing/2014/main" id="{EB83B9D0-3295-4BF0-9E7A-532F5394F2B0}"/>
+                <a16:creationId xmlns:a16="http://schemas.microsoft.com/office/drawing/2014/main" id="{DF72BC41-AD9D-48A5-99AC-44404B49D05E}"/>
               </a:ext>
             </a:extLst>
           </p:cNvPr>
@@ -3381,7 +3381,7 @@
           <p:cNvPr id="3" name="">
             <a:extLst xmlns:a="http://schemas.openxmlformats.org/drawingml/2006/main">
               <a:ext uri="{FF2B5EF4-FFF2-40B4-BE49-F238E27FC236}">
-                <a16:creationId xmlns:a16="http://schemas.microsoft.com/office/drawing/2014/main" id="{241F7E7D-E2F0-4DA5-B148-1E8AE85E9400}"/>
+                <a16:creationId xmlns:a16="http://schemas.microsoft.com/office/drawing/2014/main" id="{93432928-99E8-4769-9EC8-6E20A72D42C6}"/>
               </a:ext>
             </a:extLst>
           </p:cNvPr>
@@ -3413,7 +3413,7 @@
           <p:cNvPr id="4" name="">
             <a:extLst xmlns:a="http://schemas.openxmlformats.org/drawingml/2006/main">
               <a:ext uri="{FF2B5EF4-FFF2-40B4-BE49-F238E27FC236}">
-                <a16:creationId xmlns:a16="http://schemas.microsoft.com/office/drawing/2014/main" id="{B70AE4C2-797A-45DC-B75D-083F9300EFFF}"/>
+                <a16:creationId xmlns:a16="http://schemas.microsoft.com/office/drawing/2014/main" id="{671BF5CB-4AC5-4680-B3FF-9189EB08D5D3}"/>
               </a:ext>
             </a:extLst>
           </p:cNvPr>
@@ -3470,7 +3470,7 @@
           <p:cNvPr id="5" name="">
             <a:extLst xmlns:a="http://schemas.openxmlformats.org/drawingml/2006/main">
               <a:ext uri="{FF2B5EF4-FFF2-40B4-BE49-F238E27FC236}">
-                <a16:creationId xmlns:a16="http://schemas.microsoft.com/office/drawing/2014/main" id="{8FD02227-33D1-4EBE-AED1-08F73BD5E170}"/>
+                <a16:creationId xmlns:a16="http://schemas.microsoft.com/office/drawing/2014/main" id="{91AE5E3B-ECC4-49DF-BADC-9CC264BEFD1E}"/>
               </a:ext>
             </a:extLst>
           </p:cNvPr>
@@ -3527,7 +3527,7 @@
           <p:cNvPr id="6" name="">
             <a:extLst xmlns:a="http://schemas.openxmlformats.org/drawingml/2006/main">
               <a:ext uri="{FF2B5EF4-FFF2-40B4-BE49-F238E27FC236}">
-                <a16:creationId xmlns:a16="http://schemas.microsoft.com/office/drawing/2014/main" id="{117B84F9-3BC5-4DE9-B593-40ABAB602C9C}"/>
+                <a16:creationId xmlns:a16="http://schemas.microsoft.com/office/drawing/2014/main" id="{EEB75313-C669-4AC2-811F-6E37EFF834B9}"/>
               </a:ext>
             </a:extLst>
           </p:cNvPr>
@@ -3584,7 +3584,7 @@
           <p:cNvPr id="7" name="">
             <a:extLst xmlns:a="http://schemas.openxmlformats.org/drawingml/2006/main">
               <a:ext uri="{FF2B5EF4-FFF2-40B4-BE49-F238E27FC236}">
-                <a16:creationId xmlns:a16="http://schemas.microsoft.com/office/drawing/2014/main" id="{5A5F9C7C-70E8-4ADF-8058-CC009D382263}"/>
+                <a16:creationId xmlns:a16="http://schemas.microsoft.com/office/drawing/2014/main" id="{3C9E1E56-8AF3-451A-BB02-A977EF9B3EC3}"/>
               </a:ext>
             </a:extLst>
           </p:cNvPr>
@@ -3616,7 +3616,7 @@
           <p:cNvPr id="8" name="">
             <a:extLst xmlns:a="http://schemas.openxmlformats.org/drawingml/2006/main">
               <a:ext uri="{FF2B5EF4-FFF2-40B4-BE49-F238E27FC236}">
-                <a16:creationId xmlns:a16="http://schemas.microsoft.com/office/drawing/2014/main" id="{16436DBF-255F-4C4A-BD85-A8AF7E69B37E}"/>
+                <a16:creationId xmlns:a16="http://schemas.microsoft.com/office/drawing/2014/main" id="{C8A9107B-B3F5-4D26-B208-BF9096813699}"/>
               </a:ext>
             </a:extLst>
           </p:cNvPr>
@@ -3673,7 +3673,7 @@
           <p:cNvPr id="9" name="">
             <a:extLst xmlns:a="http://schemas.openxmlformats.org/drawingml/2006/main">
               <a:ext uri="{FF2B5EF4-FFF2-40B4-BE49-F238E27FC236}">
-                <a16:creationId xmlns:a16="http://schemas.microsoft.com/office/drawing/2014/main" id="{CF6C7DF0-40F6-48CB-B409-BBCC216A5B98}"/>
+                <a16:creationId xmlns:a16="http://schemas.microsoft.com/office/drawing/2014/main" id="{73260639-981E-4CD7-BDA8-47FFF167CD29}"/>
               </a:ext>
             </a:extLst>
           </p:cNvPr>
@@ -3730,7 +3730,7 @@
           <p:cNvPr id="10" name="">
             <a:extLst xmlns:a="http://schemas.openxmlformats.org/drawingml/2006/main">
               <a:ext uri="{FF2B5EF4-FFF2-40B4-BE49-F238E27FC236}">
-                <a16:creationId xmlns:a16="http://schemas.microsoft.com/office/drawing/2014/main" id="{5C2DEC5D-72AD-400E-B071-F48A60F65D2A}"/>
+                <a16:creationId xmlns:a16="http://schemas.microsoft.com/office/drawing/2014/main" id="{131825DC-F676-4AC9-A8CC-FF91776AD0E0}"/>
               </a:ext>
             </a:extLst>
           </p:cNvPr>
@@ -3787,7 +3787,7 @@
           <p:cNvPr id="11" name="">
             <a:extLst xmlns:a="http://schemas.openxmlformats.org/drawingml/2006/main">
               <a:ext uri="{FF2B5EF4-FFF2-40B4-BE49-F238E27FC236}">
-                <a16:creationId xmlns:a16="http://schemas.microsoft.com/office/drawing/2014/main" id="{88B57ABE-D00B-432A-8A47-5FA7B750427F}"/>
+                <a16:creationId xmlns:a16="http://schemas.microsoft.com/office/drawing/2014/main" id="{DB24A57A-846A-47F7-9492-6EC562268FC3}"/>
               </a:ext>
             </a:extLst>
           </p:cNvPr>
@@ -3821,7 +3821,7 @@
           <p:cNvPr id="12" name="">
             <a:extLst xmlns:a="http://schemas.openxmlformats.org/drawingml/2006/main">
               <a:ext uri="{FF2B5EF4-FFF2-40B4-BE49-F238E27FC236}">
-                <a16:creationId xmlns:a16="http://schemas.microsoft.com/office/drawing/2014/main" id="{3761CBF8-DA67-4196-BBE1-54B59194FEE4}"/>
+                <a16:creationId xmlns:a16="http://schemas.microsoft.com/office/drawing/2014/main" id="{4B503EE0-7A73-4138-8DEA-4592BDC84249}"/>
               </a:ext>
             </a:extLst>
           </p:cNvPr>
@@ -3878,7 +3878,7 @@
           <p:cNvPr id="13" name="">
             <a:extLst xmlns:a="http://schemas.openxmlformats.org/drawingml/2006/main">
               <a:ext uri="{FF2B5EF4-FFF2-40B4-BE49-F238E27FC236}">
-                <a16:creationId xmlns:a16="http://schemas.microsoft.com/office/drawing/2014/main" id="{34489DC6-0362-441B-AD67-00C1C55C237B}"/>
+                <a16:creationId xmlns:a16="http://schemas.microsoft.com/office/drawing/2014/main" id="{BE1A73AE-581B-4D02-B28F-8CA0722F4C5F}"/>
               </a:ext>
             </a:extLst>
           </p:cNvPr>
@@ -3935,7 +3935,7 @@
           <p:cNvPr id="14" name="">
             <a:extLst xmlns:a="http://schemas.openxmlformats.org/drawingml/2006/main">
               <a:ext uri="{FF2B5EF4-FFF2-40B4-BE49-F238E27FC236}">
-                <a16:creationId xmlns:a16="http://schemas.microsoft.com/office/drawing/2014/main" id="{3A1BFDBA-6B34-4F8C-9E55-4BF31388DBF3}"/>
+                <a16:creationId xmlns:a16="http://schemas.microsoft.com/office/drawing/2014/main" id="{0DCF5E69-01E9-4784-903D-54101A115639}"/>
               </a:ext>
             </a:extLst>
           </p:cNvPr>
@@ -3992,7 +3992,7 @@
           <p:cNvPr id="15" name="">
             <a:extLst xmlns:a="http://schemas.openxmlformats.org/drawingml/2006/main">
               <a:ext uri="{FF2B5EF4-FFF2-40B4-BE49-F238E27FC236}">
-                <a16:creationId xmlns:a16="http://schemas.microsoft.com/office/drawing/2014/main" id="{43FD0AF7-584E-421D-BF4F-3790C8473E8D}"/>
+                <a16:creationId xmlns:a16="http://schemas.microsoft.com/office/drawing/2014/main" id="{B53C0609-051A-4AD3-B792-50CCFE169A28}"/>
               </a:ext>
             </a:extLst>
           </p:cNvPr>
@@ -4026,7 +4026,7 @@
           <p:cNvPr id="16" name="">
             <a:extLst xmlns:a="http://schemas.openxmlformats.org/drawingml/2006/main">
               <a:ext uri="{FF2B5EF4-FFF2-40B4-BE49-F238E27FC236}">
-                <a16:creationId xmlns:a16="http://schemas.microsoft.com/office/drawing/2014/main" id="{62CAA902-9F38-41F2-A817-57D9F5B965A4}"/>
+                <a16:creationId xmlns:a16="http://schemas.microsoft.com/office/drawing/2014/main" id="{75311FAE-543A-44EA-AA13-EC94608101B5}"/>
               </a:ext>
             </a:extLst>
           </p:cNvPr>
@@ -4083,7 +4083,7 @@
           <p:cNvPr id="17" name="">
             <a:extLst xmlns:a="http://schemas.openxmlformats.org/drawingml/2006/main">
               <a:ext uri="{FF2B5EF4-FFF2-40B4-BE49-F238E27FC236}">
-                <a16:creationId xmlns:a16="http://schemas.microsoft.com/office/drawing/2014/main" id="{97EE3BD8-53C4-4B2C-A078-898B552A8AFC}"/>
+                <a16:creationId xmlns:a16="http://schemas.microsoft.com/office/drawing/2014/main" id="{56688A93-9C85-4260-BB94-4389079CE391}"/>
               </a:ext>
             </a:extLst>
           </p:cNvPr>
@@ -4140,7 +4140,7 @@
           <p:cNvPr id="18" name="">
             <a:extLst xmlns:a="http://schemas.openxmlformats.org/drawingml/2006/main">
               <a:ext uri="{FF2B5EF4-FFF2-40B4-BE49-F238E27FC236}">
-                <a16:creationId xmlns:a16="http://schemas.microsoft.com/office/drawing/2014/main" id="{BEEE2AA5-FCC3-4D4D-9217-E3A3A9305BEC}"/>
+                <a16:creationId xmlns:a16="http://schemas.microsoft.com/office/drawing/2014/main" id="{38A192BE-3597-4E0F-91EE-B23A0D4B3648}"/>
               </a:ext>
             </a:extLst>
           </p:cNvPr>
@@ -4195,7 +4195,7 @@
     </p:spTree>
     <p:extLst>
       <p:ext uri="{BB962C8B-B14F-4D97-AF65-F5344CB8AC3E}">
-        <p14:creationId xmlns:p14="http://schemas.microsoft.com/office/powerpoint/2010/main" val="78221973"/>
+        <p14:creationId xmlns:p14="http://schemas.microsoft.com/office/powerpoint/2010/main" val="1439093879"/>
       </p:ext>
     </p:extLst>
   </p:cSld>
@@ -4350,7 +4350,7 @@
           <p:cNvPr id="23" name="">
             <a:extLst xmlns:a="http://schemas.openxmlformats.org/drawingml/2006/main">
               <a:ext uri="{FF2B5EF4-FFF2-40B4-BE49-F238E27FC236}">
-                <a16:creationId xmlns:a16="http://schemas.microsoft.com/office/drawing/2014/main" id="{2F425E77-091B-4C22-8AE0-37EC59611618}"/>
+                <a16:creationId xmlns:a16="http://schemas.microsoft.com/office/drawing/2014/main" id="{66036A90-30BB-4F90-A00A-D684563AD74A}"/>
               </a:ext>
             </a:extLst>
           </p:cNvPr>
@@ -4382,7 +4382,7 @@
           <p:cNvPr id="2" name="">
             <a:extLst xmlns:a="http://schemas.openxmlformats.org/drawingml/2006/main">
               <a:ext uri="{FF2B5EF4-FFF2-40B4-BE49-F238E27FC236}">
-                <a16:creationId xmlns:a16="http://schemas.microsoft.com/office/drawing/2014/main" id="{07C76614-A376-4272-AAA6-EDA6B35EDECB}"/>
+                <a16:creationId xmlns:a16="http://schemas.microsoft.com/office/drawing/2014/main" id="{6E1B9AC4-104B-432B-920E-A78AC9C0013B}"/>
               </a:ext>
             </a:extLst>
           </p:cNvPr>
@@ -4439,7 +4439,7 @@
           <p:cNvPr id="3" name="">
             <a:extLst xmlns:a="http://schemas.openxmlformats.org/drawingml/2006/main">
               <a:ext uri="{FF2B5EF4-FFF2-40B4-BE49-F238E27FC236}">
-                <a16:creationId xmlns:a16="http://schemas.microsoft.com/office/drawing/2014/main" id="{81349703-9237-4E64-9287-BCC50BF21F32}"/>
+                <a16:creationId xmlns:a16="http://schemas.microsoft.com/office/drawing/2014/main" id="{E2AFA8E9-12B6-4F9A-B481-A4484AAC8899}"/>
               </a:ext>
             </a:extLst>
           </p:cNvPr>
@@ -4471,7 +4471,7 @@
           <p:cNvPr id="4" name="">
             <a:extLst xmlns:a="http://schemas.openxmlformats.org/drawingml/2006/main">
               <a:ext uri="{FF2B5EF4-FFF2-40B4-BE49-F238E27FC236}">
-                <a16:creationId xmlns:a16="http://schemas.microsoft.com/office/drawing/2014/main" id="{377E113E-0918-401B-B68F-D471649B7CA2}"/>
+                <a16:creationId xmlns:a16="http://schemas.microsoft.com/office/drawing/2014/main" id="{7A1EFD7B-E836-466F-8780-95B59890BD68}"/>
               </a:ext>
             </a:extLst>
           </p:cNvPr>
@@ -4528,7 +4528,7 @@
           <p:cNvPr id="5" name="">
             <a:extLst xmlns:a="http://schemas.openxmlformats.org/drawingml/2006/main">
               <a:ext uri="{FF2B5EF4-FFF2-40B4-BE49-F238E27FC236}">
-                <a16:creationId xmlns:a16="http://schemas.microsoft.com/office/drawing/2014/main" id="{3ABD1AD1-4A07-4269-B10B-C3CDF17D3FBF}"/>
+                <a16:creationId xmlns:a16="http://schemas.microsoft.com/office/drawing/2014/main" id="{C0BFC0A8-5314-4B5D-9F6A-8E8723E35D70}"/>
               </a:ext>
             </a:extLst>
           </p:cNvPr>
@@ -4585,7 +4585,7 @@
           <p:cNvPr id="6" name="">
             <a:extLst xmlns:a="http://schemas.openxmlformats.org/drawingml/2006/main">
               <a:ext uri="{FF2B5EF4-FFF2-40B4-BE49-F238E27FC236}">
-                <a16:creationId xmlns:a16="http://schemas.microsoft.com/office/drawing/2014/main" id="{06B58584-79C9-46CD-93D4-4052CA49B67A}"/>
+                <a16:creationId xmlns:a16="http://schemas.microsoft.com/office/drawing/2014/main" id="{C7910D7D-BD9E-4CE3-8535-C9F3B59261C6}"/>
               </a:ext>
             </a:extLst>
           </p:cNvPr>
@@ -4642,7 +4642,7 @@
           <p:cNvPr id="7" name="">
             <a:extLst xmlns:a="http://schemas.openxmlformats.org/drawingml/2006/main">
               <a:ext uri="{FF2B5EF4-FFF2-40B4-BE49-F238E27FC236}">
-                <a16:creationId xmlns:a16="http://schemas.microsoft.com/office/drawing/2014/main" id="{34AC912A-E27C-4E5A-AEB8-E51E91832061}"/>
+                <a16:creationId xmlns:a16="http://schemas.microsoft.com/office/drawing/2014/main" id="{8AB52532-75EE-43EA-AF19-BE708DE608E0}"/>
               </a:ext>
             </a:extLst>
           </p:cNvPr>
@@ -4674,7 +4674,7 @@
           <p:cNvPr id="8" name="">
             <a:extLst xmlns:a="http://schemas.openxmlformats.org/drawingml/2006/main">
               <a:ext uri="{FF2B5EF4-FFF2-40B4-BE49-F238E27FC236}">
-                <a16:creationId xmlns:a16="http://schemas.microsoft.com/office/drawing/2014/main" id="{D0FF4DF5-E1C9-466C-9A3B-3D0E6FD935A4}"/>
+                <a16:creationId xmlns:a16="http://schemas.microsoft.com/office/drawing/2014/main" id="{59110E8B-6EC9-42D4-A373-C0E3751C9187}"/>
               </a:ext>
             </a:extLst>
           </p:cNvPr>
@@ -4731,7 +4731,7 @@
           <p:cNvPr id="9" name="">
             <a:extLst xmlns:a="http://schemas.openxmlformats.org/drawingml/2006/main">
               <a:ext uri="{FF2B5EF4-FFF2-40B4-BE49-F238E27FC236}">
-                <a16:creationId xmlns:a16="http://schemas.microsoft.com/office/drawing/2014/main" id="{ADBFD106-594A-41DB-9B92-9C66A38B3B29}"/>
+                <a16:creationId xmlns:a16="http://schemas.microsoft.com/office/drawing/2014/main" id="{051EEA2D-A669-4723-B0B3-45AE3B6E55F0}"/>
               </a:ext>
             </a:extLst>
           </p:cNvPr>
@@ -4788,7 +4788,7 @@
           <p:cNvPr id="10" name="">
             <a:extLst xmlns:a="http://schemas.openxmlformats.org/drawingml/2006/main">
               <a:ext uri="{FF2B5EF4-FFF2-40B4-BE49-F238E27FC236}">
-                <a16:creationId xmlns:a16="http://schemas.microsoft.com/office/drawing/2014/main" id="{525938DF-10C6-40B0-9D3F-917EEC86BB9E}"/>
+                <a16:creationId xmlns:a16="http://schemas.microsoft.com/office/drawing/2014/main" id="{3D879AED-F3F3-4C0A-B29F-6B256BD954A4}"/>
               </a:ext>
             </a:extLst>
           </p:cNvPr>
@@ -4822,7 +4822,7 @@
           <p:cNvPr id="11" name="">
             <a:extLst xmlns:a="http://schemas.openxmlformats.org/drawingml/2006/main">
               <a:ext uri="{FF2B5EF4-FFF2-40B4-BE49-F238E27FC236}">
-                <a16:creationId xmlns:a16="http://schemas.microsoft.com/office/drawing/2014/main" id="{F52E1A0B-CA15-49CF-9725-D53BAEA2670D}"/>
+                <a16:creationId xmlns:a16="http://schemas.microsoft.com/office/drawing/2014/main" id="{D9496F9B-B357-4425-BA3C-3DCDF8BD7293}"/>
               </a:ext>
             </a:extLst>
           </p:cNvPr>
@@ -4854,7 +4854,7 @@
           <p:cNvPr id="12" name="">
             <a:extLst xmlns:a="http://schemas.openxmlformats.org/drawingml/2006/main">
               <a:ext uri="{FF2B5EF4-FFF2-40B4-BE49-F238E27FC236}">
-                <a16:creationId xmlns:a16="http://schemas.microsoft.com/office/drawing/2014/main" id="{16ED30D4-A1CB-46B8-A651-3FA6A2280608}"/>
+                <a16:creationId xmlns:a16="http://schemas.microsoft.com/office/drawing/2014/main" id="{F3E1CC7F-6653-424B-ADA0-5BC65225DB65}"/>
               </a:ext>
             </a:extLst>
           </p:cNvPr>
@@ -4911,7 +4911,7 @@
           <p:cNvPr id="13" name="">
             <a:extLst xmlns:a="http://schemas.openxmlformats.org/drawingml/2006/main">
               <a:ext uri="{FF2B5EF4-FFF2-40B4-BE49-F238E27FC236}">
-                <a16:creationId xmlns:a16="http://schemas.microsoft.com/office/drawing/2014/main" id="{7EBBB341-222A-40D6-9B74-971E8BC04251}"/>
+                <a16:creationId xmlns:a16="http://schemas.microsoft.com/office/drawing/2014/main" id="{DE806FEB-9E43-4535-9381-66A2EF6F3F98}"/>
               </a:ext>
             </a:extLst>
           </p:cNvPr>
@@ -4968,7 +4968,7 @@
           <p:cNvPr id="14" name="">
             <a:extLst xmlns:a="http://schemas.openxmlformats.org/drawingml/2006/main">
               <a:ext uri="{FF2B5EF4-FFF2-40B4-BE49-F238E27FC236}">
-                <a16:creationId xmlns:a16="http://schemas.microsoft.com/office/drawing/2014/main" id="{C93E9AAD-430F-4742-B8E6-CC67BC1ECE79}"/>
+                <a16:creationId xmlns:a16="http://schemas.microsoft.com/office/drawing/2014/main" id="{12198F6B-E0B2-4E7C-8AE6-EEB4CD0C2337}"/>
               </a:ext>
             </a:extLst>
           </p:cNvPr>
@@ -5002,7 +5002,7 @@
           <p:cNvPr id="15" name="">
             <a:extLst xmlns:a="http://schemas.openxmlformats.org/drawingml/2006/main">
               <a:ext uri="{FF2B5EF4-FFF2-40B4-BE49-F238E27FC236}">
-                <a16:creationId xmlns:a16="http://schemas.microsoft.com/office/drawing/2014/main" id="{208450A3-A968-459E-88AF-1CFE882D06E9}"/>
+                <a16:creationId xmlns:a16="http://schemas.microsoft.com/office/drawing/2014/main" id="{AC52DD54-A698-4145-AF7D-A147ECF65CD1}"/>
               </a:ext>
             </a:extLst>
           </p:cNvPr>
@@ -5034,7 +5034,7 @@
           <p:cNvPr id="16" name="">
             <a:extLst xmlns:a="http://schemas.openxmlformats.org/drawingml/2006/main">
               <a:ext uri="{FF2B5EF4-FFF2-40B4-BE49-F238E27FC236}">
-                <a16:creationId xmlns:a16="http://schemas.microsoft.com/office/drawing/2014/main" id="{5224553A-A7C2-4BA9-9711-F7B0A3A02875}"/>
+                <a16:creationId xmlns:a16="http://schemas.microsoft.com/office/drawing/2014/main" id="{28C7A857-FD29-435E-A1C3-7E334DE88E6A}"/>
               </a:ext>
             </a:extLst>
           </p:cNvPr>
@@ -5091,7 +5091,7 @@
           <p:cNvPr id="17" name="">
             <a:extLst xmlns:a="http://schemas.openxmlformats.org/drawingml/2006/main">
               <a:ext uri="{FF2B5EF4-FFF2-40B4-BE49-F238E27FC236}">
-                <a16:creationId xmlns:a16="http://schemas.microsoft.com/office/drawing/2014/main" id="{5A24AF5D-6BE2-4601-9EA2-F5DABCDA4B75}"/>
+                <a16:creationId xmlns:a16="http://schemas.microsoft.com/office/drawing/2014/main" id="{9392EA13-B429-4888-8F5B-724E4756B9AD}"/>
               </a:ext>
             </a:extLst>
           </p:cNvPr>
@@ -5148,7 +5148,7 @@
           <p:cNvPr id="18" name="">
             <a:extLst xmlns:a="http://schemas.openxmlformats.org/drawingml/2006/main">
               <a:ext uri="{FF2B5EF4-FFF2-40B4-BE49-F238E27FC236}">
-                <a16:creationId xmlns:a16="http://schemas.microsoft.com/office/drawing/2014/main" id="{266EA634-E7DA-4628-83C2-694CD3789E3D}"/>
+                <a16:creationId xmlns:a16="http://schemas.microsoft.com/office/drawing/2014/main" id="{051412BD-A52B-420F-8C15-B69F7850D321}"/>
               </a:ext>
             </a:extLst>
           </p:cNvPr>
@@ -5182,7 +5182,7 @@
           <p:cNvPr id="19" name="">
             <a:extLst xmlns:a="http://schemas.openxmlformats.org/drawingml/2006/main">
               <a:ext uri="{FF2B5EF4-FFF2-40B4-BE49-F238E27FC236}">
-                <a16:creationId xmlns:a16="http://schemas.microsoft.com/office/drawing/2014/main" id="{A092B528-7AAB-40ED-93D1-8FCFDAADB981}"/>
+                <a16:creationId xmlns:a16="http://schemas.microsoft.com/office/drawing/2014/main" id="{38AA5874-9570-47AC-8233-8D9A4D9FE964}"/>
               </a:ext>
             </a:extLst>
           </p:cNvPr>
@@ -5214,7 +5214,7 @@
           <p:cNvPr id="20" name="">
             <a:extLst xmlns:a="http://schemas.openxmlformats.org/drawingml/2006/main">
               <a:ext uri="{FF2B5EF4-FFF2-40B4-BE49-F238E27FC236}">
-                <a16:creationId xmlns:a16="http://schemas.microsoft.com/office/drawing/2014/main" id="{80B8F0C1-1DC3-4BD1-9582-D37E4D6E58D7}"/>
+                <a16:creationId xmlns:a16="http://schemas.microsoft.com/office/drawing/2014/main" id="{5A37932F-2A11-4157-9030-86645046D607}"/>
               </a:ext>
             </a:extLst>
           </p:cNvPr>
@@ -5271,7 +5271,7 @@
           <p:cNvPr id="21" name="">
             <a:extLst xmlns:a="http://schemas.openxmlformats.org/drawingml/2006/main">
               <a:ext uri="{FF2B5EF4-FFF2-40B4-BE49-F238E27FC236}">
-                <a16:creationId xmlns:a16="http://schemas.microsoft.com/office/drawing/2014/main" id="{1406E095-46E9-40A1-92A7-84DB6C275982}"/>
+                <a16:creationId xmlns:a16="http://schemas.microsoft.com/office/drawing/2014/main" id="{6602674C-F8C7-4AEF-9236-90402511393F}"/>
               </a:ext>
             </a:extLst>
           </p:cNvPr>
@@ -5328,7 +5328,7 @@
           <p:cNvPr id="22" name="">
             <a:extLst xmlns:a="http://schemas.openxmlformats.org/drawingml/2006/main">
               <a:ext uri="{FF2B5EF4-FFF2-40B4-BE49-F238E27FC236}">
-                <a16:creationId xmlns:a16="http://schemas.microsoft.com/office/drawing/2014/main" id="{02DA3592-5E5D-421F-A79E-2CA788644A76}"/>
+                <a16:creationId xmlns:a16="http://schemas.microsoft.com/office/drawing/2014/main" id="{863F101C-3776-4420-A0FE-64A0E3069415}"/>
               </a:ext>
             </a:extLst>
           </p:cNvPr>
@@ -5383,7 +5383,7 @@
     </p:spTree>
     <p:extLst>
       <p:ext uri="{BB962C8B-B14F-4D97-AF65-F5344CB8AC3E}">
-        <p14:creationId xmlns:p14="http://schemas.microsoft.com/office/powerpoint/2010/main" val="1992861137"/>
+        <p14:creationId xmlns:p14="http://schemas.microsoft.com/office/powerpoint/2010/main" val="1267877959"/>
       </p:ext>
     </p:extLst>
   </p:cSld>
@@ -5584,7 +5584,7 @@
           <p:cNvPr id="23" name="">
             <a:extLst xmlns:a="http://schemas.openxmlformats.org/drawingml/2006/main">
               <a:ext uri="{FF2B5EF4-FFF2-40B4-BE49-F238E27FC236}">
-                <a16:creationId xmlns:a16="http://schemas.microsoft.com/office/drawing/2014/main" id="{5633AEA1-4D4A-4711-A4FF-5485C5176866}"/>
+                <a16:creationId xmlns:a16="http://schemas.microsoft.com/office/drawing/2014/main" id="{9B76C8A1-8C4A-46DF-86D2-EC93EB5CDDEA}"/>
               </a:ext>
             </a:extLst>
           </p:cNvPr>
@@ -5616,7 +5616,7 @@
           <p:cNvPr id="2" name="">
             <a:extLst xmlns:a="http://schemas.openxmlformats.org/drawingml/2006/main">
               <a:ext uri="{FF2B5EF4-FFF2-40B4-BE49-F238E27FC236}">
-                <a16:creationId xmlns:a16="http://schemas.microsoft.com/office/drawing/2014/main" id="{002D661D-7997-4A10-816E-5E7140065435}"/>
+                <a16:creationId xmlns:a16="http://schemas.microsoft.com/office/drawing/2014/main" id="{AD8962CB-31D9-4E23-8437-FC33F2DF56E1}"/>
               </a:ext>
             </a:extLst>
           </p:cNvPr>
@@ -5673,7 +5673,7 @@
           <p:cNvPr id="3" name="">
             <a:extLst xmlns:a="http://schemas.openxmlformats.org/drawingml/2006/main">
               <a:ext uri="{FF2B5EF4-FFF2-40B4-BE49-F238E27FC236}">
-                <a16:creationId xmlns:a16="http://schemas.microsoft.com/office/drawing/2014/main" id="{3DED9A33-9614-49DF-9F8B-90286F3346AF}"/>
+                <a16:creationId xmlns:a16="http://schemas.microsoft.com/office/drawing/2014/main" id="{88043E0E-5718-4388-83E1-4C5B0ADE0E3C}"/>
               </a:ext>
             </a:extLst>
           </p:cNvPr>
@@ -5705,7 +5705,7 @@
           <p:cNvPr id="4" name="">
             <a:extLst xmlns:a="http://schemas.openxmlformats.org/drawingml/2006/main">
               <a:ext uri="{FF2B5EF4-FFF2-40B4-BE49-F238E27FC236}">
-                <a16:creationId xmlns:a16="http://schemas.microsoft.com/office/drawing/2014/main" id="{9EAC8CE7-C554-4C44-9687-DA23B02DB395}"/>
+                <a16:creationId xmlns:a16="http://schemas.microsoft.com/office/drawing/2014/main" id="{BF42370B-36EF-455B-ACB3-824ED52E2110}"/>
               </a:ext>
             </a:extLst>
           </p:cNvPr>
@@ -5762,7 +5762,7 @@
           <p:cNvPr id="5" name="">
             <a:extLst xmlns:a="http://schemas.openxmlformats.org/drawingml/2006/main">
               <a:ext uri="{FF2B5EF4-FFF2-40B4-BE49-F238E27FC236}">
-                <a16:creationId xmlns:a16="http://schemas.microsoft.com/office/drawing/2014/main" id="{ADF1B07D-4E91-45FA-A8FB-5F08BA1BD86C}"/>
+                <a16:creationId xmlns:a16="http://schemas.microsoft.com/office/drawing/2014/main" id="{15AA7C1A-B7F2-47A1-8799-53260411BDA2}"/>
               </a:ext>
             </a:extLst>
           </p:cNvPr>
@@ -5819,7 +5819,7 @@
           <p:cNvPr id="6" name="">
             <a:extLst xmlns:a="http://schemas.openxmlformats.org/drawingml/2006/main">
               <a:ext uri="{FF2B5EF4-FFF2-40B4-BE49-F238E27FC236}">
-                <a16:creationId xmlns:a16="http://schemas.microsoft.com/office/drawing/2014/main" id="{74E9A815-FCBE-4B47-9DA6-37B5DDB45241}"/>
+                <a16:creationId xmlns:a16="http://schemas.microsoft.com/office/drawing/2014/main" id="{673D65C0-2014-41FF-A1B0-449A3038A50E}"/>
               </a:ext>
             </a:extLst>
           </p:cNvPr>
@@ -5876,7 +5876,7 @@
           <p:cNvPr id="7" name="">
             <a:extLst xmlns:a="http://schemas.openxmlformats.org/drawingml/2006/main">
               <a:ext uri="{FF2B5EF4-FFF2-40B4-BE49-F238E27FC236}">
-                <a16:creationId xmlns:a16="http://schemas.microsoft.com/office/drawing/2014/main" id="{CDD7D454-0FBA-4D8F-AF05-C0D21EB43B34}"/>
+                <a16:creationId xmlns:a16="http://schemas.microsoft.com/office/drawing/2014/main" id="{DEDFEF70-C750-4A50-9C5B-4EC840727BFD}"/>
               </a:ext>
             </a:extLst>
           </p:cNvPr>
@@ -5908,7 +5908,7 @@
           <p:cNvPr id="8" name="">
             <a:extLst xmlns:a="http://schemas.openxmlformats.org/drawingml/2006/main">
               <a:ext uri="{FF2B5EF4-FFF2-40B4-BE49-F238E27FC236}">
-                <a16:creationId xmlns:a16="http://schemas.microsoft.com/office/drawing/2014/main" id="{01EF81EF-BD8E-4C0B-BE1C-7A84F46DE361}"/>
+                <a16:creationId xmlns:a16="http://schemas.microsoft.com/office/drawing/2014/main" id="{918C647D-61DA-4806-9CAC-CD5D0CD1B482}"/>
               </a:ext>
             </a:extLst>
           </p:cNvPr>
@@ -5965,7 +5965,7 @@
           <p:cNvPr id="9" name="">
             <a:extLst xmlns:a="http://schemas.openxmlformats.org/drawingml/2006/main">
               <a:ext uri="{FF2B5EF4-FFF2-40B4-BE49-F238E27FC236}">
-                <a16:creationId xmlns:a16="http://schemas.microsoft.com/office/drawing/2014/main" id="{C604DF52-BB2A-4971-98BD-AC25001EE315}"/>
+                <a16:creationId xmlns:a16="http://schemas.microsoft.com/office/drawing/2014/main" id="{09B0E915-2B00-491C-993A-6676C28E013A}"/>
               </a:ext>
             </a:extLst>
           </p:cNvPr>
@@ -6022,7 +6022,7 @@
           <p:cNvPr id="10" name="">
             <a:extLst xmlns:a="http://schemas.openxmlformats.org/drawingml/2006/main">
               <a:ext uri="{FF2B5EF4-FFF2-40B4-BE49-F238E27FC236}">
-                <a16:creationId xmlns:a16="http://schemas.microsoft.com/office/drawing/2014/main" id="{BBF7DB98-42F9-44D2-9A61-F483D6096B1A}"/>
+                <a16:creationId xmlns:a16="http://schemas.microsoft.com/office/drawing/2014/main" id="{98E1DE74-4CBB-4996-A89B-F7F70C6CA8DB}"/>
               </a:ext>
             </a:extLst>
           </p:cNvPr>
@@ -6056,7 +6056,7 @@
           <p:cNvPr id="11" name="">
             <a:extLst xmlns:a="http://schemas.openxmlformats.org/drawingml/2006/main">
               <a:ext uri="{FF2B5EF4-FFF2-40B4-BE49-F238E27FC236}">
-                <a16:creationId xmlns:a16="http://schemas.microsoft.com/office/drawing/2014/main" id="{A2F6F938-E14A-4D26-A5CA-CBA4D870DE05}"/>
+                <a16:creationId xmlns:a16="http://schemas.microsoft.com/office/drawing/2014/main" id="{1DE32713-BE24-4C05-849F-53B52CBD7B4E}"/>
               </a:ext>
             </a:extLst>
           </p:cNvPr>
@@ -6088,7 +6088,7 @@
           <p:cNvPr id="12" name="">
             <a:extLst xmlns:a="http://schemas.openxmlformats.org/drawingml/2006/main">
               <a:ext uri="{FF2B5EF4-FFF2-40B4-BE49-F238E27FC236}">
-                <a16:creationId xmlns:a16="http://schemas.microsoft.com/office/drawing/2014/main" id="{44129D6D-9A61-4CBA-829C-35C332CA471A}"/>
+                <a16:creationId xmlns:a16="http://schemas.microsoft.com/office/drawing/2014/main" id="{2E57EBA6-10BD-4F2A-89BC-FBEB7A180DE9}"/>
               </a:ext>
             </a:extLst>
           </p:cNvPr>
@@ -6145,7 +6145,7 @@
           <p:cNvPr id="13" name="">
             <a:extLst xmlns:a="http://schemas.openxmlformats.org/drawingml/2006/main">
               <a:ext uri="{FF2B5EF4-FFF2-40B4-BE49-F238E27FC236}">
-                <a16:creationId xmlns:a16="http://schemas.microsoft.com/office/drawing/2014/main" id="{68138254-5A2B-4D52-A448-430ED4754E37}"/>
+                <a16:creationId xmlns:a16="http://schemas.microsoft.com/office/drawing/2014/main" id="{F5392E0F-8CD8-46C5-9874-F08C5B9BDE78}"/>
               </a:ext>
             </a:extLst>
           </p:cNvPr>
@@ -6202,7 +6202,7 @@
           <p:cNvPr id="14" name="">
             <a:extLst xmlns:a="http://schemas.openxmlformats.org/drawingml/2006/main">
               <a:ext uri="{FF2B5EF4-FFF2-40B4-BE49-F238E27FC236}">
-                <a16:creationId xmlns:a16="http://schemas.microsoft.com/office/drawing/2014/main" id="{FB5C975E-5095-4863-A4E7-3DBE8F7BDF54}"/>
+                <a16:creationId xmlns:a16="http://schemas.microsoft.com/office/drawing/2014/main" id="{0DE1063B-B3F9-4722-946E-291437E85126}"/>
               </a:ext>
             </a:extLst>
           </p:cNvPr>
@@ -6236,7 +6236,7 @@
           <p:cNvPr id="15" name="">
             <a:extLst xmlns:a="http://schemas.openxmlformats.org/drawingml/2006/main">
               <a:ext uri="{FF2B5EF4-FFF2-40B4-BE49-F238E27FC236}">
-                <a16:creationId xmlns:a16="http://schemas.microsoft.com/office/drawing/2014/main" id="{EC9069CE-DAE4-4C65-AED8-437050BBEF8D}"/>
+                <a16:creationId xmlns:a16="http://schemas.microsoft.com/office/drawing/2014/main" id="{3FB35A4F-D51C-4416-A4BF-A31139C68CC4}"/>
               </a:ext>
             </a:extLst>
           </p:cNvPr>
@@ -6268,7 +6268,7 @@
           <p:cNvPr id="16" name="">
             <a:extLst xmlns:a="http://schemas.openxmlformats.org/drawingml/2006/main">
               <a:ext uri="{FF2B5EF4-FFF2-40B4-BE49-F238E27FC236}">
-                <a16:creationId xmlns:a16="http://schemas.microsoft.com/office/drawing/2014/main" id="{F908DB80-6BA2-408D-B0CC-AD69CC54FC41}"/>
+                <a16:creationId xmlns:a16="http://schemas.microsoft.com/office/drawing/2014/main" id="{E15CE083-6456-4E9A-A22C-9540C058B16E}"/>
               </a:ext>
             </a:extLst>
           </p:cNvPr>
@@ -6325,7 +6325,7 @@
           <p:cNvPr id="17" name="">
             <a:extLst xmlns:a="http://schemas.openxmlformats.org/drawingml/2006/main">
               <a:ext uri="{FF2B5EF4-FFF2-40B4-BE49-F238E27FC236}">
-                <a16:creationId xmlns:a16="http://schemas.microsoft.com/office/drawing/2014/main" id="{C78C137C-0AB5-4355-AA6E-B4D9C646394A}"/>
+                <a16:creationId xmlns:a16="http://schemas.microsoft.com/office/drawing/2014/main" id="{200F6F05-43AC-41B8-B60B-C3A2AF5CAA71}"/>
               </a:ext>
             </a:extLst>
           </p:cNvPr>
@@ -6382,7 +6382,7 @@
           <p:cNvPr id="18" name="">
             <a:extLst xmlns:a="http://schemas.openxmlformats.org/drawingml/2006/main">
               <a:ext uri="{FF2B5EF4-FFF2-40B4-BE49-F238E27FC236}">
-                <a16:creationId xmlns:a16="http://schemas.microsoft.com/office/drawing/2014/main" id="{023A14A6-E769-4855-BE88-677237330CBE}"/>
+                <a16:creationId xmlns:a16="http://schemas.microsoft.com/office/drawing/2014/main" id="{15698E8E-F083-4621-9B90-9BD6517EEBC6}"/>
               </a:ext>
             </a:extLst>
           </p:cNvPr>
@@ -6416,7 +6416,7 @@
           <p:cNvPr id="19" name="">
             <a:extLst xmlns:a="http://schemas.openxmlformats.org/drawingml/2006/main">
               <a:ext uri="{FF2B5EF4-FFF2-40B4-BE49-F238E27FC236}">
-                <a16:creationId xmlns:a16="http://schemas.microsoft.com/office/drawing/2014/main" id="{9B7408B8-49AD-4FBA-9E37-F7D39E248F10}"/>
+                <a16:creationId xmlns:a16="http://schemas.microsoft.com/office/drawing/2014/main" id="{545B8813-E44E-401E-9F40-328BF91316B9}"/>
               </a:ext>
             </a:extLst>
           </p:cNvPr>
@@ -6448,7 +6448,7 @@
           <p:cNvPr id="20" name="">
             <a:extLst xmlns:a="http://schemas.openxmlformats.org/drawingml/2006/main">
               <a:ext uri="{FF2B5EF4-FFF2-40B4-BE49-F238E27FC236}">
-                <a16:creationId xmlns:a16="http://schemas.microsoft.com/office/drawing/2014/main" id="{3E96D319-441C-4623-B294-9A132A17ED08}"/>
+                <a16:creationId xmlns:a16="http://schemas.microsoft.com/office/drawing/2014/main" id="{64FAABA2-A810-44AB-9DC5-F0E77B9A827D}"/>
               </a:ext>
             </a:extLst>
           </p:cNvPr>
@@ -6505,7 +6505,7 @@
           <p:cNvPr id="21" name="">
             <a:extLst xmlns:a="http://schemas.openxmlformats.org/drawingml/2006/main">
               <a:ext uri="{FF2B5EF4-FFF2-40B4-BE49-F238E27FC236}">
-                <a16:creationId xmlns:a16="http://schemas.microsoft.com/office/drawing/2014/main" id="{6EBF1094-6F48-41B5-8918-4B8C50B1D25A}"/>
+                <a16:creationId xmlns:a16="http://schemas.microsoft.com/office/drawing/2014/main" id="{870F5A97-0469-4771-B6FE-1157E81C1A6C}"/>
               </a:ext>
             </a:extLst>
           </p:cNvPr>
@@ -6562,7 +6562,7 @@
           <p:cNvPr id="22" name="">
             <a:extLst xmlns:a="http://schemas.openxmlformats.org/drawingml/2006/main">
               <a:ext uri="{FF2B5EF4-FFF2-40B4-BE49-F238E27FC236}">
-                <a16:creationId xmlns:a16="http://schemas.microsoft.com/office/drawing/2014/main" id="{B3872D84-91B5-4D91-BA4A-FF70E3F9000B}"/>
+                <a16:creationId xmlns:a16="http://schemas.microsoft.com/office/drawing/2014/main" id="{C5BB8A56-7D7E-4369-857D-99FCA5EEFA92}"/>
               </a:ext>
             </a:extLst>
           </p:cNvPr>
@@ -6617,7 +6617,7 @@
     </p:spTree>
     <p:extLst>
       <p:ext uri="{BB962C8B-B14F-4D97-AF65-F5344CB8AC3E}">
-        <p14:creationId xmlns:p14="http://schemas.microsoft.com/office/powerpoint/2010/main" val="1588806443"/>
+        <p14:creationId xmlns:p14="http://schemas.microsoft.com/office/powerpoint/2010/main" val="932848944"/>
       </p:ext>
     </p:extLst>
   </p:cSld>
@@ -6818,7 +6818,7 @@
           <p:cNvPr id="16" name="">
             <a:extLst xmlns:a="http://schemas.openxmlformats.org/drawingml/2006/main">
               <a:ext uri="{FF2B5EF4-FFF2-40B4-BE49-F238E27FC236}">
-                <a16:creationId xmlns:a16="http://schemas.microsoft.com/office/drawing/2014/main" id="{E2167871-61C8-4CB4-BAF7-48D62887CB47}"/>
+                <a16:creationId xmlns:a16="http://schemas.microsoft.com/office/drawing/2014/main" id="{7BAF44CE-5AAA-48F5-9975-4A3E53C1E024}"/>
               </a:ext>
             </a:extLst>
           </p:cNvPr>
@@ -6850,7 +6850,7 @@
           <p:cNvPr id="2" name="">
             <a:extLst xmlns:a="http://schemas.openxmlformats.org/drawingml/2006/main">
               <a:ext uri="{FF2B5EF4-FFF2-40B4-BE49-F238E27FC236}">
-                <a16:creationId xmlns:a16="http://schemas.microsoft.com/office/drawing/2014/main" id="{E6D235E5-9F33-41AE-930F-358902E87BD8}"/>
+                <a16:creationId xmlns:a16="http://schemas.microsoft.com/office/drawing/2014/main" id="{153519C6-0B8D-4838-9304-EC5105CF1002}"/>
               </a:ext>
             </a:extLst>
           </p:cNvPr>
@@ -6907,7 +6907,7 @@
           <p:cNvPr id="3" name="">
             <a:extLst xmlns:a="http://schemas.openxmlformats.org/drawingml/2006/main">
               <a:ext uri="{FF2B5EF4-FFF2-40B4-BE49-F238E27FC236}">
-                <a16:creationId xmlns:a16="http://schemas.microsoft.com/office/drawing/2014/main" id="{2F22409C-E844-4A26-8E10-61AADD1D57FC}"/>
+                <a16:creationId xmlns:a16="http://schemas.microsoft.com/office/drawing/2014/main" id="{63FCF676-B949-45F4-9A2A-F3022C81003D}"/>
               </a:ext>
             </a:extLst>
           </p:cNvPr>
@@ -6939,7 +6939,7 @@
           <p:cNvPr id="4" name="">
             <a:extLst xmlns:a="http://schemas.openxmlformats.org/drawingml/2006/main">
               <a:ext uri="{FF2B5EF4-FFF2-40B4-BE49-F238E27FC236}">
-                <a16:creationId xmlns:a16="http://schemas.microsoft.com/office/drawing/2014/main" id="{CC4D6D2D-9EDC-469E-BE2B-2260324ABA8F}"/>
+                <a16:creationId xmlns:a16="http://schemas.microsoft.com/office/drawing/2014/main" id="{EB3D8864-941B-47F5-A85F-547BB33B95BB}"/>
               </a:ext>
             </a:extLst>
           </p:cNvPr>
@@ -6996,7 +6996,7 @@
           <p:cNvPr id="5" name="">
             <a:extLst xmlns:a="http://schemas.openxmlformats.org/drawingml/2006/main">
               <a:ext uri="{FF2B5EF4-FFF2-40B4-BE49-F238E27FC236}">
-                <a16:creationId xmlns:a16="http://schemas.microsoft.com/office/drawing/2014/main" id="{12A75D8D-8D53-4642-BA78-AAB8BE08B46B}"/>
+                <a16:creationId xmlns:a16="http://schemas.microsoft.com/office/drawing/2014/main" id="{B5C4A733-91E7-447C-8849-32160183EC01}"/>
               </a:ext>
             </a:extLst>
           </p:cNvPr>
@@ -7053,7 +7053,7 @@
           <p:cNvPr id="6" name="">
             <a:extLst xmlns:a="http://schemas.openxmlformats.org/drawingml/2006/main">
               <a:ext uri="{FF2B5EF4-FFF2-40B4-BE49-F238E27FC236}">
-                <a16:creationId xmlns:a16="http://schemas.microsoft.com/office/drawing/2014/main" id="{12687A47-0713-4941-BF63-AAD938A24A06}"/>
+                <a16:creationId xmlns:a16="http://schemas.microsoft.com/office/drawing/2014/main" id="{2B3E06D0-CB9D-47FE-8A1B-ACFEC4503770}"/>
               </a:ext>
             </a:extLst>
           </p:cNvPr>
@@ -7110,7 +7110,7 @@
           <p:cNvPr id="7" name="">
             <a:extLst xmlns:a="http://schemas.openxmlformats.org/drawingml/2006/main">
               <a:ext uri="{FF2B5EF4-FFF2-40B4-BE49-F238E27FC236}">
-                <a16:creationId xmlns:a16="http://schemas.microsoft.com/office/drawing/2014/main" id="{52536AF1-4066-4334-A8CE-A27E408ECDDA}"/>
+                <a16:creationId xmlns:a16="http://schemas.microsoft.com/office/drawing/2014/main" id="{200EDCCA-ACC3-4B73-8930-D74D419627A7}"/>
               </a:ext>
             </a:extLst>
           </p:cNvPr>
@@ -7142,7 +7142,7 @@
           <p:cNvPr id="8" name="">
             <a:extLst xmlns:a="http://schemas.openxmlformats.org/drawingml/2006/main">
               <a:ext uri="{FF2B5EF4-FFF2-40B4-BE49-F238E27FC236}">
-                <a16:creationId xmlns:a16="http://schemas.microsoft.com/office/drawing/2014/main" id="{292B161B-825A-483D-B855-611D98AB0521}"/>
+                <a16:creationId xmlns:a16="http://schemas.microsoft.com/office/drawing/2014/main" id="{82B32F0F-D6B1-4819-BC70-5EAA35F65CF4}"/>
               </a:ext>
             </a:extLst>
           </p:cNvPr>
@@ -7199,7 +7199,7 @@
           <p:cNvPr id="9" name="">
             <a:extLst xmlns:a="http://schemas.openxmlformats.org/drawingml/2006/main">
               <a:ext uri="{FF2B5EF4-FFF2-40B4-BE49-F238E27FC236}">
-                <a16:creationId xmlns:a16="http://schemas.microsoft.com/office/drawing/2014/main" id="{8F17AEE0-DF2F-4B54-9605-833E20F9169E}"/>
+                <a16:creationId xmlns:a16="http://schemas.microsoft.com/office/drawing/2014/main" id="{1B5CD1DF-0D30-44BA-AB3B-718966F7C002}"/>
               </a:ext>
             </a:extLst>
           </p:cNvPr>
@@ -7256,7 +7256,7 @@
           <p:cNvPr id="10" name="">
             <a:extLst xmlns:a="http://schemas.openxmlformats.org/drawingml/2006/main">
               <a:ext uri="{FF2B5EF4-FFF2-40B4-BE49-F238E27FC236}">
-                <a16:creationId xmlns:a16="http://schemas.microsoft.com/office/drawing/2014/main" id="{23467447-006E-4EBC-A2CE-2033C1D3EC18}"/>
+                <a16:creationId xmlns:a16="http://schemas.microsoft.com/office/drawing/2014/main" id="{A0D2E6D4-FDEE-4BBD-BF3D-44FD65E3CE9E}"/>
               </a:ext>
             </a:extLst>
           </p:cNvPr>
@@ -7313,7 +7313,7 @@
           <p:cNvPr id="11" name="">
             <a:extLst xmlns:a="http://schemas.openxmlformats.org/drawingml/2006/main">
               <a:ext uri="{FF2B5EF4-FFF2-40B4-BE49-F238E27FC236}">
-                <a16:creationId xmlns:a16="http://schemas.microsoft.com/office/drawing/2014/main" id="{2C193B75-FEFA-4156-B13D-AEBDD96519DB}"/>
+                <a16:creationId xmlns:a16="http://schemas.microsoft.com/office/drawing/2014/main" id="{2FAC87C0-458B-4710-BFA6-2431177A2442}"/>
               </a:ext>
             </a:extLst>
           </p:cNvPr>
@@ -7345,7 +7345,7 @@
           <p:cNvPr id="12" name="">
             <a:extLst xmlns:a="http://schemas.openxmlformats.org/drawingml/2006/main">
               <a:ext uri="{FF2B5EF4-FFF2-40B4-BE49-F238E27FC236}">
-                <a16:creationId xmlns:a16="http://schemas.microsoft.com/office/drawing/2014/main" id="{072A2424-8380-4667-9502-1FE16A4F6654}"/>
+                <a16:creationId xmlns:a16="http://schemas.microsoft.com/office/drawing/2014/main" id="{80E27835-F6DD-4036-B0C1-3A5A2D349D41}"/>
               </a:ext>
             </a:extLst>
           </p:cNvPr>
@@ -7402,7 +7402,7 @@
           <p:cNvPr id="13" name="">
             <a:extLst xmlns:a="http://schemas.openxmlformats.org/drawingml/2006/main">
               <a:ext uri="{FF2B5EF4-FFF2-40B4-BE49-F238E27FC236}">
-                <a16:creationId xmlns:a16="http://schemas.microsoft.com/office/drawing/2014/main" id="{84CC966B-D33C-49A0-92EB-8536318DBA17}"/>
+                <a16:creationId xmlns:a16="http://schemas.microsoft.com/office/drawing/2014/main" id="{C1F5243E-DADC-4F06-AEDD-9F879B901ACA}"/>
               </a:ext>
             </a:extLst>
           </p:cNvPr>
@@ -7459,7 +7459,7 @@
           <p:cNvPr id="14" name="">
             <a:extLst xmlns:a="http://schemas.openxmlformats.org/drawingml/2006/main">
               <a:ext uri="{FF2B5EF4-FFF2-40B4-BE49-F238E27FC236}">
-                <a16:creationId xmlns:a16="http://schemas.microsoft.com/office/drawing/2014/main" id="{BDF47EAE-C3EE-4179-9F98-829768EF0BD3}"/>
+                <a16:creationId xmlns:a16="http://schemas.microsoft.com/office/drawing/2014/main" id="{A5149785-D8B2-4737-9163-463D12799B3C}"/>
               </a:ext>
             </a:extLst>
           </p:cNvPr>
@@ -7516,7 +7516,7 @@
           <p:cNvPr id="15" name="">
             <a:extLst xmlns:a="http://schemas.openxmlformats.org/drawingml/2006/main">
               <a:ext uri="{FF2B5EF4-FFF2-40B4-BE49-F238E27FC236}">
-                <a16:creationId xmlns:a16="http://schemas.microsoft.com/office/drawing/2014/main" id="{4B86B956-B286-43AC-A598-64A89EF42A30}"/>
+                <a16:creationId xmlns:a16="http://schemas.microsoft.com/office/drawing/2014/main" id="{9FE65C11-5800-4AD2-844D-EBD31BF23918}"/>
               </a:ext>
             </a:extLst>
           </p:cNvPr>
@@ -7571,7 +7571,7 @@
     </p:spTree>
     <p:extLst>
       <p:ext uri="{BB962C8B-B14F-4D97-AF65-F5344CB8AC3E}">
-        <p14:creationId xmlns:p14="http://schemas.microsoft.com/office/powerpoint/2010/main" val="263176490"/>
+        <p14:creationId xmlns:p14="http://schemas.microsoft.com/office/powerpoint/2010/main" val="1032281650"/>
       </p:ext>
     </p:extLst>
   </p:cSld>
@@ -7772,7 +7772,7 @@
           <p:cNvPr id="23" name="">
             <a:extLst xmlns:a="http://schemas.openxmlformats.org/drawingml/2006/main">
               <a:ext uri="{FF2B5EF4-FFF2-40B4-BE49-F238E27FC236}">
-                <a16:creationId xmlns:a16="http://schemas.microsoft.com/office/drawing/2014/main" id="{4C60DFE5-B941-4B3B-8C3A-6BEACF87A443}"/>
+                <a16:creationId xmlns:a16="http://schemas.microsoft.com/office/drawing/2014/main" id="{4514A68E-0F52-483B-8B3F-5ACA9F22399E}"/>
               </a:ext>
             </a:extLst>
           </p:cNvPr>
@@ -7804,7 +7804,7 @@
           <p:cNvPr id="2" name="">
             <a:extLst xmlns:a="http://schemas.openxmlformats.org/drawingml/2006/main">
               <a:ext uri="{FF2B5EF4-FFF2-40B4-BE49-F238E27FC236}">
-                <a16:creationId xmlns:a16="http://schemas.microsoft.com/office/drawing/2014/main" id="{4DE09DC4-236A-48E8-B217-1FD824C794AC}"/>
+                <a16:creationId xmlns:a16="http://schemas.microsoft.com/office/drawing/2014/main" id="{8C2E590F-3864-4676-9460-C1878BD8F611}"/>
               </a:ext>
             </a:extLst>
           </p:cNvPr>
@@ -7861,7 +7861,7 @@
           <p:cNvPr id="3" name="">
             <a:extLst xmlns:a="http://schemas.openxmlformats.org/drawingml/2006/main">
               <a:ext uri="{FF2B5EF4-FFF2-40B4-BE49-F238E27FC236}">
-                <a16:creationId xmlns:a16="http://schemas.microsoft.com/office/drawing/2014/main" id="{BAF958E5-B3B4-4EF9-9B5C-30BD8752C69D}"/>
+                <a16:creationId xmlns:a16="http://schemas.microsoft.com/office/drawing/2014/main" id="{F843268F-FF98-4EB3-AC20-64BC0F568A5C}"/>
               </a:ext>
             </a:extLst>
           </p:cNvPr>
@@ -7893,7 +7893,7 @@
           <p:cNvPr id="4" name="">
             <a:extLst xmlns:a="http://schemas.openxmlformats.org/drawingml/2006/main">
               <a:ext uri="{FF2B5EF4-FFF2-40B4-BE49-F238E27FC236}">
-                <a16:creationId xmlns:a16="http://schemas.microsoft.com/office/drawing/2014/main" id="{EF7E895C-D0E6-4067-9D3F-21E5D23772F1}"/>
+                <a16:creationId xmlns:a16="http://schemas.microsoft.com/office/drawing/2014/main" id="{1EF29DB8-1676-46A9-977D-1127621AE34B}"/>
               </a:ext>
             </a:extLst>
           </p:cNvPr>
@@ -7950,7 +7950,7 @@
           <p:cNvPr id="5" name="">
             <a:extLst xmlns:a="http://schemas.openxmlformats.org/drawingml/2006/main">
               <a:ext uri="{FF2B5EF4-FFF2-40B4-BE49-F238E27FC236}">
-                <a16:creationId xmlns:a16="http://schemas.microsoft.com/office/drawing/2014/main" id="{05105BCF-1DA0-4042-B4AE-80F3DBC45F00}"/>
+                <a16:creationId xmlns:a16="http://schemas.microsoft.com/office/drawing/2014/main" id="{7DBB91CB-43A0-4838-ADE3-CA20EF25CEFF}"/>
               </a:ext>
             </a:extLst>
           </p:cNvPr>
@@ -8007,7 +8007,7 @@
           <p:cNvPr id="6" name="">
             <a:extLst xmlns:a="http://schemas.openxmlformats.org/drawingml/2006/main">
               <a:ext uri="{FF2B5EF4-FFF2-40B4-BE49-F238E27FC236}">
-                <a16:creationId xmlns:a16="http://schemas.microsoft.com/office/drawing/2014/main" id="{BD0F2F7F-7D73-4DE7-AC3C-93B1EDE400CA}"/>
+                <a16:creationId xmlns:a16="http://schemas.microsoft.com/office/drawing/2014/main" id="{780A2EFB-0201-43C1-8C5A-5BF4EFE2E930}"/>
               </a:ext>
             </a:extLst>
           </p:cNvPr>
@@ -8064,7 +8064,7 @@
           <p:cNvPr id="7" name="">
             <a:extLst xmlns:a="http://schemas.openxmlformats.org/drawingml/2006/main">
               <a:ext uri="{FF2B5EF4-FFF2-40B4-BE49-F238E27FC236}">
-                <a16:creationId xmlns:a16="http://schemas.microsoft.com/office/drawing/2014/main" id="{55616C1A-FB67-43ED-9256-4656132651A9}"/>
+                <a16:creationId xmlns:a16="http://schemas.microsoft.com/office/drawing/2014/main" id="{0271ED56-77CB-4C6F-BFB8-0C94DC815A73}"/>
               </a:ext>
             </a:extLst>
           </p:cNvPr>
@@ -8096,7 +8096,7 @@
           <p:cNvPr id="8" name="">
             <a:extLst xmlns:a="http://schemas.openxmlformats.org/drawingml/2006/main">
               <a:ext uri="{FF2B5EF4-FFF2-40B4-BE49-F238E27FC236}">
-                <a16:creationId xmlns:a16="http://schemas.microsoft.com/office/drawing/2014/main" id="{AC6B659B-2E3C-4F10-8B14-92209CE6FBC6}"/>
+                <a16:creationId xmlns:a16="http://schemas.microsoft.com/office/drawing/2014/main" id="{3039B963-2531-4288-90BF-12CC7E8197F6}"/>
               </a:ext>
             </a:extLst>
           </p:cNvPr>
@@ -8153,7 +8153,7 @@
           <p:cNvPr id="9" name="">
             <a:extLst xmlns:a="http://schemas.openxmlformats.org/drawingml/2006/main">
               <a:ext uri="{FF2B5EF4-FFF2-40B4-BE49-F238E27FC236}">
-                <a16:creationId xmlns:a16="http://schemas.microsoft.com/office/drawing/2014/main" id="{ADA9E58F-D7EA-4DC0-8AA5-32D67D9AAF8D}"/>
+                <a16:creationId xmlns:a16="http://schemas.microsoft.com/office/drawing/2014/main" id="{1F75CEF5-4B8C-42EB-AF2C-D2EE643BD45E}"/>
               </a:ext>
             </a:extLst>
           </p:cNvPr>
@@ -8210,19 +8210,19 @@
           <p:cNvPr id="10" name="">
             <a:extLst xmlns:a="http://schemas.openxmlformats.org/drawingml/2006/main">
               <a:ext uri="{FF2B5EF4-FFF2-40B4-BE49-F238E27FC236}">
-                <a16:creationId xmlns:a16="http://schemas.microsoft.com/office/drawing/2014/main" id="{0DE42CA2-4A7C-40A6-8DFE-8106F26090BC}"/>
-              </a:ext>
-            </a:extLst>
-          </p:cNvPr>
-          <p:cNvSpPr>
-            <a:spLocks xmlns:a="http://schemas.openxmlformats.org/drawingml/2006/main" noGrp="1"/>
-          </p:cNvSpPr>
-          <p:nvPr/>
-        </p:nvSpPr>
-        <p:spPr>
-          <a:xfrm xmlns:a="http://schemas.openxmlformats.org/drawingml/2006/main">
-            <a:off x="914400" y="1257300"/>
-            <a:ext cx="10363200" cy="781050"/>
+                <a16:creationId xmlns:a16="http://schemas.microsoft.com/office/drawing/2014/main" id="{F2B56106-843A-4A71-BF1A-4B04C993AE8B}"/>
+              </a:ext>
+            </a:extLst>
+          </p:cNvPr>
+          <p:cNvSpPr>
+            <a:spLocks xmlns:a="http://schemas.openxmlformats.org/drawingml/2006/main" noGrp="1"/>
+          </p:cNvSpPr>
+          <p:nvPr/>
+        </p:nvSpPr>
+        <p:spPr>
+          <a:xfrm xmlns:a="http://schemas.openxmlformats.org/drawingml/2006/main">
+            <a:off x="857250" y="1219200"/>
+            <a:ext cx="10477500" cy="742950"/>
           </a:xfrm>
           <a:prstGeom xmlns:a="http://schemas.openxmlformats.org/drawingml/2006/main" prst="rect">
             <a:avLst/>
@@ -8239,7 +8239,7 @@
           <a:lstStyle xmlns:a="http://schemas.openxmlformats.org/drawingml/2006/main"/>
           <a:p xmlns:a="http://schemas.openxmlformats.org/drawingml/2006/main">
             <a:pPr algn="ctr">
-              <a:defRPr sz="2175" b="1">
+              <a:defRPr sz="2100" b="1">
                 <a:solidFill>
                   <a:srgbClr val="17253A"/>
                 </a:solidFill>
@@ -8249,7 +8249,7 @@
               </a:defRPr>
             </a:pPr>
             <a:r>
-              <a:rPr sz="2175" b="1">
+              <a:rPr sz="2100" b="1">
                 <a:solidFill>
                   <a:srgbClr val="17253A"/>
                 </a:solidFill>
@@ -8267,28 +8267,30 @@
           <p:cNvPr id="11" name="">
             <a:extLst xmlns:a="http://schemas.openxmlformats.org/drawingml/2006/main">
               <a:ext uri="{FF2B5EF4-FFF2-40B4-BE49-F238E27FC236}">
-                <a16:creationId xmlns:a16="http://schemas.microsoft.com/office/drawing/2014/main" id="{F5AD3083-95C0-44CB-BAE1-FED5734A601F}"/>
-              </a:ext>
-            </a:extLst>
-          </p:cNvPr>
-          <p:cNvSpPr>
-            <a:spLocks xmlns:a="http://schemas.openxmlformats.org/drawingml/2006/main" noGrp="1"/>
-          </p:cNvSpPr>
-          <p:nvPr/>
-        </p:nvSpPr>
-        <p:spPr>
-          <a:xfrm xmlns:a="http://schemas.openxmlformats.org/drawingml/2006/main">
-            <a:off x="1000125" y="2247900"/>
-            <a:ext cx="476250" cy="476250"/>
-          </a:xfrm>
-          <a:prstGeom xmlns:a="http://schemas.openxmlformats.org/drawingml/2006/main" prst="ellipse">
+                <a16:creationId xmlns:a16="http://schemas.microsoft.com/office/drawing/2014/main" id="{CDECE370-9E31-401E-A856-109809B74C6A}"/>
+              </a:ext>
+            </a:extLst>
+          </p:cNvPr>
+          <p:cNvSpPr>
+            <a:spLocks xmlns:a="http://schemas.openxmlformats.org/drawingml/2006/main" noGrp="1"/>
+          </p:cNvSpPr>
+          <p:nvPr/>
+        </p:nvSpPr>
+        <p:spPr>
+          <a:xfrm xmlns:a="http://schemas.openxmlformats.org/drawingml/2006/main">
+            <a:off x="971550" y="2124075"/>
+            <a:ext cx="38100" cy="3524250"/>
+          </a:xfrm>
+          <a:prstGeom xmlns:a="http://schemas.openxmlformats.org/drawingml/2006/main" prst="rect">
             <a:avLst/>
           </a:prstGeom>
           <a:solidFill xmlns:a="http://schemas.openxmlformats.org/drawingml/2006/main">
-            <a:srgbClr val="18324A"/>
+            <a:srgbClr val="2C6E73"/>
           </a:solidFill>
           <a:ln xmlns:a="http://schemas.openxmlformats.org/drawingml/2006/main" w="0">
-            <a:noFill/>
+            <a:solidFill>
+              <a:srgbClr val="2C6E73"/>
+            </a:solidFill>
           </a:ln>
         </p:spPr>
       </p:sp>
@@ -8297,19 +8299,19 @@
           <p:cNvPr id="12" name="">
             <a:extLst xmlns:a="http://schemas.openxmlformats.org/drawingml/2006/main">
               <a:ext uri="{FF2B5EF4-FFF2-40B4-BE49-F238E27FC236}">
-                <a16:creationId xmlns:a16="http://schemas.microsoft.com/office/drawing/2014/main" id="{9462B650-BF16-49EA-A3D1-207F7ECF9817}"/>
-              </a:ext>
-            </a:extLst>
-          </p:cNvPr>
-          <p:cNvSpPr>
-            <a:spLocks xmlns:a="http://schemas.openxmlformats.org/drawingml/2006/main" noGrp="1"/>
-          </p:cNvSpPr>
-          <p:nvPr/>
-        </p:nvSpPr>
-        <p:spPr>
-          <a:xfrm xmlns:a="http://schemas.openxmlformats.org/drawingml/2006/main">
-            <a:off x="1000125" y="2276475"/>
-            <a:ext cx="476250" cy="419100"/>
+                <a16:creationId xmlns:a16="http://schemas.microsoft.com/office/drawing/2014/main" id="{59C95B65-9A1A-480E-8D56-4A202EDEF068}"/>
+              </a:ext>
+            </a:extLst>
+          </p:cNvPr>
+          <p:cNvSpPr>
+            <a:spLocks xmlns:a="http://schemas.openxmlformats.org/drawingml/2006/main" noGrp="1"/>
+          </p:cNvSpPr>
+          <p:nvPr/>
+        </p:nvSpPr>
+        <p:spPr>
+          <a:xfrm xmlns:a="http://schemas.openxmlformats.org/drawingml/2006/main">
+            <a:off x="1162050" y="2200275"/>
+            <a:ext cx="400050" cy="400050"/>
           </a:xfrm>
           <a:prstGeom xmlns:a="http://schemas.openxmlformats.org/drawingml/2006/main" prst="rect">
             <a:avLst/>
@@ -8326,9 +8328,9 @@
           <a:lstStyle xmlns:a="http://schemas.openxmlformats.org/drawingml/2006/main"/>
           <a:p xmlns:a="http://schemas.openxmlformats.org/drawingml/2006/main">
             <a:pPr algn="ctr">
-              <a:defRPr sz="1350" b="1">
-                <a:solidFill>
-                  <a:srgbClr val="FFFFFF"/>
+              <a:defRPr sz="1125" b="1">
+                <a:solidFill>
+                  <a:srgbClr val="2C6E73"/>
                 </a:solidFill>
                 <a:latin typeface="Arial"/>
                 <a:ea typeface="Arial"/>
@@ -8336,9 +8338,9 @@
               </a:defRPr>
             </a:pPr>
             <a:r>
-              <a:rPr sz="1350" b="1">
-                <a:solidFill>
-                  <a:srgbClr val="FFFFFF"/>
+              <a:rPr sz="1125" b="1">
+                <a:solidFill>
+                  <a:srgbClr val="2C6E73"/>
                 </a:solidFill>
                 <a:latin typeface="Arial"/>
                 <a:ea typeface="Arial"/>
@@ -8354,19 +8356,19 @@
           <p:cNvPr id="13" name="">
             <a:extLst xmlns:a="http://schemas.openxmlformats.org/drawingml/2006/main">
               <a:ext uri="{FF2B5EF4-FFF2-40B4-BE49-F238E27FC236}">
-                <a16:creationId xmlns:a16="http://schemas.microsoft.com/office/drawing/2014/main" id="{4A074F03-66B4-4372-9D59-CD74187A4C22}"/>
-              </a:ext>
-            </a:extLst>
-          </p:cNvPr>
-          <p:cNvSpPr>
-            <a:spLocks xmlns:a="http://schemas.openxmlformats.org/drawingml/2006/main" noGrp="1"/>
-          </p:cNvSpPr>
-          <p:nvPr/>
-        </p:nvSpPr>
-        <p:spPr>
-          <a:xfrm xmlns:a="http://schemas.openxmlformats.org/drawingml/2006/main">
-            <a:off x="1714500" y="2181225"/>
-            <a:ext cx="9429750" cy="609600"/>
+                <a16:creationId xmlns:a16="http://schemas.microsoft.com/office/drawing/2014/main" id="{B28EA557-AA7D-400D-98E0-180D05C9B9DC}"/>
+              </a:ext>
+            </a:extLst>
+          </p:cNvPr>
+          <p:cNvSpPr>
+            <a:spLocks xmlns:a="http://schemas.openxmlformats.org/drawingml/2006/main" noGrp="1"/>
+          </p:cNvSpPr>
+          <p:nvPr/>
+        </p:nvSpPr>
+        <p:spPr>
+          <a:xfrm xmlns:a="http://schemas.openxmlformats.org/drawingml/2006/main">
+            <a:off x="1714500" y="2114550"/>
+            <a:ext cx="9525000" cy="809625"/>
           </a:xfrm>
           <a:prstGeom xmlns:a="http://schemas.openxmlformats.org/drawingml/2006/main" prst="rect">
             <a:avLst/>
@@ -8383,7 +8385,7 @@
           <a:lstStyle xmlns:a="http://schemas.openxmlformats.org/drawingml/2006/main"/>
           <a:p xmlns:a="http://schemas.openxmlformats.org/drawingml/2006/main">
             <a:pPr algn="l">
-              <a:defRPr sz="1500" b="0">
+              <a:defRPr sz="1725" b="0">
                 <a:solidFill>
                   <a:srgbClr val="17253A"/>
                 </a:solidFill>
@@ -8393,7 +8395,7 @@
               </a:defRPr>
             </a:pPr>
             <a:r>
-              <a:rPr sz="1500" b="0">
+              <a:rPr sz="1725" b="0">
                 <a:solidFill>
                   <a:srgbClr val="17253A"/>
                 </a:solidFill>
@@ -8401,7 +8403,7 @@
                 <a:ea typeface="Arial"/>
                 <a:cs typeface="Arial"/>
               </a:rPr>
-              <a:t>Identify the structure: State whether the task concerns factors or multiples.</a:t>
+              <a:t>Factors of 84: 1, 2, 3, 4, 6, 7, 12, 14, 21, 28, 42, 84</a:t>
             </a:r>
           </a:p>
         </p:txBody>
@@ -8411,28 +8413,30 @@
           <p:cNvPr id="14" name="">
             <a:extLst xmlns:a="http://schemas.openxmlformats.org/drawingml/2006/main">
               <a:ext uri="{FF2B5EF4-FFF2-40B4-BE49-F238E27FC236}">
-                <a16:creationId xmlns:a16="http://schemas.microsoft.com/office/drawing/2014/main" id="{049C1BE2-5436-4001-87FD-92282A203A92}"/>
-              </a:ext>
-            </a:extLst>
-          </p:cNvPr>
-          <p:cNvSpPr>
-            <a:spLocks xmlns:a="http://schemas.openxmlformats.org/drawingml/2006/main" noGrp="1"/>
-          </p:cNvSpPr>
-          <p:nvPr/>
-        </p:nvSpPr>
-        <p:spPr>
-          <a:xfrm xmlns:a="http://schemas.openxmlformats.org/drawingml/2006/main">
-            <a:off x="1000125" y="2990850"/>
-            <a:ext cx="476250" cy="476250"/>
-          </a:xfrm>
-          <a:prstGeom xmlns:a="http://schemas.openxmlformats.org/drawingml/2006/main" prst="ellipse">
+                <a16:creationId xmlns:a16="http://schemas.microsoft.com/office/drawing/2014/main" id="{26B930CD-EA63-4329-8FED-AD712CF3F47C}"/>
+              </a:ext>
+            </a:extLst>
+          </p:cNvPr>
+          <p:cNvSpPr>
+            <a:spLocks xmlns:a="http://schemas.openxmlformats.org/drawingml/2006/main" noGrp="1"/>
+          </p:cNvSpPr>
+          <p:nvPr/>
+        </p:nvSpPr>
+        <p:spPr>
+          <a:xfrm xmlns:a="http://schemas.openxmlformats.org/drawingml/2006/main">
+            <a:off x="1714500" y="2943225"/>
+            <a:ext cx="9334500" cy="9525"/>
+          </a:xfrm>
+          <a:prstGeom xmlns:a="http://schemas.openxmlformats.org/drawingml/2006/main" prst="rect">
             <a:avLst/>
           </a:prstGeom>
           <a:solidFill xmlns:a="http://schemas.openxmlformats.org/drawingml/2006/main">
-            <a:srgbClr val="2C6E73"/>
+            <a:srgbClr val="D9E0E6"/>
           </a:solidFill>
           <a:ln xmlns:a="http://schemas.openxmlformats.org/drawingml/2006/main" w="0">
-            <a:noFill/>
+            <a:solidFill>
+              <a:srgbClr val="D9E0E6"/>
+            </a:solidFill>
           </a:ln>
         </p:spPr>
       </p:sp>
@@ -8441,19 +8445,19 @@
           <p:cNvPr id="15" name="">
             <a:extLst xmlns:a="http://schemas.openxmlformats.org/drawingml/2006/main">
               <a:ext uri="{FF2B5EF4-FFF2-40B4-BE49-F238E27FC236}">
-                <a16:creationId xmlns:a16="http://schemas.microsoft.com/office/drawing/2014/main" id="{95F9416A-3465-403A-9110-110A56EBDC4D}"/>
-              </a:ext>
-            </a:extLst>
-          </p:cNvPr>
-          <p:cNvSpPr>
-            <a:spLocks xmlns:a="http://schemas.openxmlformats.org/drawingml/2006/main" noGrp="1"/>
-          </p:cNvSpPr>
-          <p:nvPr/>
-        </p:nvSpPr>
-        <p:spPr>
-          <a:xfrm xmlns:a="http://schemas.openxmlformats.org/drawingml/2006/main">
-            <a:off x="1000125" y="3019425"/>
-            <a:ext cx="476250" cy="419100"/>
+                <a16:creationId xmlns:a16="http://schemas.microsoft.com/office/drawing/2014/main" id="{E50B1B59-A7E5-4C21-B3B6-04AF1C13050A}"/>
+              </a:ext>
+            </a:extLst>
+          </p:cNvPr>
+          <p:cNvSpPr>
+            <a:spLocks xmlns:a="http://schemas.openxmlformats.org/drawingml/2006/main" noGrp="1"/>
+          </p:cNvSpPr>
+          <p:nvPr/>
+        </p:nvSpPr>
+        <p:spPr>
+          <a:xfrm xmlns:a="http://schemas.openxmlformats.org/drawingml/2006/main">
+            <a:off x="1162050" y="3076575"/>
+            <a:ext cx="400050" cy="400050"/>
           </a:xfrm>
           <a:prstGeom xmlns:a="http://schemas.openxmlformats.org/drawingml/2006/main" prst="rect">
             <a:avLst/>
@@ -8470,9 +8474,9 @@
           <a:lstStyle xmlns:a="http://schemas.openxmlformats.org/drawingml/2006/main"/>
           <a:p xmlns:a="http://schemas.openxmlformats.org/drawingml/2006/main">
             <a:pPr algn="ctr">
-              <a:defRPr sz="1350" b="1">
-                <a:solidFill>
-                  <a:srgbClr val="FFFFFF"/>
+              <a:defRPr sz="1125" b="1">
+                <a:solidFill>
+                  <a:srgbClr val="2C6E73"/>
                 </a:solidFill>
                 <a:latin typeface="Arial"/>
                 <a:ea typeface="Arial"/>
@@ -8480,9 +8484,9 @@
               </a:defRPr>
             </a:pPr>
             <a:r>
-              <a:rPr sz="1350" b="1">
-                <a:solidFill>
-                  <a:srgbClr val="FFFFFF"/>
+              <a:rPr sz="1125" b="1">
+                <a:solidFill>
+                  <a:srgbClr val="2C6E73"/>
                 </a:solidFill>
                 <a:latin typeface="Arial"/>
                 <a:ea typeface="Arial"/>
@@ -8498,19 +8502,19 @@
           <p:cNvPr id="16" name="">
             <a:extLst xmlns:a="http://schemas.openxmlformats.org/drawingml/2006/main">
               <a:ext uri="{FF2B5EF4-FFF2-40B4-BE49-F238E27FC236}">
-                <a16:creationId xmlns:a16="http://schemas.microsoft.com/office/drawing/2014/main" id="{53417FE6-90A2-483C-B5A1-16A224C9DF5D}"/>
-              </a:ext>
-            </a:extLst>
-          </p:cNvPr>
-          <p:cNvSpPr>
-            <a:spLocks xmlns:a="http://schemas.openxmlformats.org/drawingml/2006/main" noGrp="1"/>
-          </p:cNvSpPr>
-          <p:nvPr/>
-        </p:nvSpPr>
-        <p:spPr>
-          <a:xfrm xmlns:a="http://schemas.openxmlformats.org/drawingml/2006/main">
-            <a:off x="1714500" y="2924175"/>
-            <a:ext cx="9429750" cy="609600"/>
+                <a16:creationId xmlns:a16="http://schemas.microsoft.com/office/drawing/2014/main" id="{73ED99E5-17F0-4A4F-931F-4CC2A5F19222}"/>
+              </a:ext>
+            </a:extLst>
+          </p:cNvPr>
+          <p:cNvSpPr>
+            <a:spLocks xmlns:a="http://schemas.openxmlformats.org/drawingml/2006/main" noGrp="1"/>
+          </p:cNvSpPr>
+          <p:nvPr/>
+        </p:nvSpPr>
+        <p:spPr>
+          <a:xfrm xmlns:a="http://schemas.openxmlformats.org/drawingml/2006/main">
+            <a:off x="1714500" y="2990850"/>
+            <a:ext cx="9525000" cy="809625"/>
           </a:xfrm>
           <a:prstGeom xmlns:a="http://schemas.openxmlformats.org/drawingml/2006/main" prst="rect">
             <a:avLst/>
@@ -8527,7 +8531,7 @@
           <a:lstStyle xmlns:a="http://schemas.openxmlformats.org/drawingml/2006/main"/>
           <a:p xmlns:a="http://schemas.openxmlformats.org/drawingml/2006/main">
             <a:pPr algn="l">
-              <a:defRPr sz="1500" b="0">
+              <a:defRPr sz="1725" b="0">
                 <a:solidFill>
                   <a:srgbClr val="17253A"/>
                 </a:solidFill>
@@ -8537,7 +8541,7 @@
               </a:defRPr>
             </a:pPr>
             <a:r>
-              <a:rPr sz="1500" b="0">
+              <a:rPr sz="1725" b="0">
                 <a:solidFill>
                   <a:srgbClr val="17253A"/>
                 </a:solidFill>
@@ -8545,7 +8549,7 @@
                 <a:ea typeface="Arial"/>
                 <a:cs typeface="Arial"/>
               </a:rPr>
-              <a:t>Set up the method: Work systematically from the smallest possible factor or multiple.</a:t>
+              <a:t>Factors of 126: 1, 2, 3, 6, 7, 9, 14, 18, 21, 42, 63, 126</a:t>
             </a:r>
           </a:p>
         </p:txBody>
@@ -8555,28 +8559,30 @@
           <p:cNvPr id="17" name="">
             <a:extLst xmlns:a="http://schemas.openxmlformats.org/drawingml/2006/main">
               <a:ext uri="{FF2B5EF4-FFF2-40B4-BE49-F238E27FC236}">
-                <a16:creationId xmlns:a16="http://schemas.microsoft.com/office/drawing/2014/main" id="{A91C28E2-C48D-4D75-B2CD-DF83F873A5D1}"/>
-              </a:ext>
-            </a:extLst>
-          </p:cNvPr>
-          <p:cNvSpPr>
-            <a:spLocks xmlns:a="http://schemas.openxmlformats.org/drawingml/2006/main" noGrp="1"/>
-          </p:cNvSpPr>
-          <p:nvPr/>
-        </p:nvSpPr>
-        <p:spPr>
-          <a:xfrm xmlns:a="http://schemas.openxmlformats.org/drawingml/2006/main">
-            <a:off x="1000125" y="3733800"/>
-            <a:ext cx="476250" cy="476250"/>
-          </a:xfrm>
-          <a:prstGeom xmlns:a="http://schemas.openxmlformats.org/drawingml/2006/main" prst="ellipse">
+                <a16:creationId xmlns:a16="http://schemas.microsoft.com/office/drawing/2014/main" id="{90726854-E20E-4D96-AB83-92CB60B34A7F}"/>
+              </a:ext>
+            </a:extLst>
+          </p:cNvPr>
+          <p:cNvSpPr>
+            <a:spLocks xmlns:a="http://schemas.openxmlformats.org/drawingml/2006/main" noGrp="1"/>
+          </p:cNvSpPr>
+          <p:nvPr/>
+        </p:nvSpPr>
+        <p:spPr>
+          <a:xfrm xmlns:a="http://schemas.openxmlformats.org/drawingml/2006/main">
+            <a:off x="1714500" y="3819525"/>
+            <a:ext cx="9334500" cy="9525"/>
+          </a:xfrm>
+          <a:prstGeom xmlns:a="http://schemas.openxmlformats.org/drawingml/2006/main" prst="rect">
             <a:avLst/>
           </a:prstGeom>
           <a:solidFill xmlns:a="http://schemas.openxmlformats.org/drawingml/2006/main">
-            <a:srgbClr val="2C6E73"/>
+            <a:srgbClr val="D9E0E6"/>
           </a:solidFill>
           <a:ln xmlns:a="http://schemas.openxmlformats.org/drawingml/2006/main" w="0">
-            <a:noFill/>
+            <a:solidFill>
+              <a:srgbClr val="D9E0E6"/>
+            </a:solidFill>
           </a:ln>
         </p:spPr>
       </p:sp>
@@ -8585,19 +8591,19 @@
           <p:cNvPr id="18" name="">
             <a:extLst xmlns:a="http://schemas.openxmlformats.org/drawingml/2006/main">
               <a:ext uri="{FF2B5EF4-FFF2-40B4-BE49-F238E27FC236}">
-                <a16:creationId xmlns:a16="http://schemas.microsoft.com/office/drawing/2014/main" id="{0A9D60C2-F049-4E9E-914C-DCFCA78DD256}"/>
-              </a:ext>
-            </a:extLst>
-          </p:cNvPr>
-          <p:cNvSpPr>
-            <a:spLocks xmlns:a="http://schemas.openxmlformats.org/drawingml/2006/main" noGrp="1"/>
-          </p:cNvSpPr>
-          <p:nvPr/>
-        </p:nvSpPr>
-        <p:spPr>
-          <a:xfrm xmlns:a="http://schemas.openxmlformats.org/drawingml/2006/main">
-            <a:off x="1000125" y="3762375"/>
-            <a:ext cx="476250" cy="419100"/>
+                <a16:creationId xmlns:a16="http://schemas.microsoft.com/office/drawing/2014/main" id="{BD67860D-EF2C-4527-8AED-C32C90CE59C3}"/>
+              </a:ext>
+            </a:extLst>
+          </p:cNvPr>
+          <p:cNvSpPr>
+            <a:spLocks xmlns:a="http://schemas.openxmlformats.org/drawingml/2006/main" noGrp="1"/>
+          </p:cNvSpPr>
+          <p:nvPr/>
+        </p:nvSpPr>
+        <p:spPr>
+          <a:xfrm xmlns:a="http://schemas.openxmlformats.org/drawingml/2006/main">
+            <a:off x="1162050" y="3952875"/>
+            <a:ext cx="400050" cy="400050"/>
           </a:xfrm>
           <a:prstGeom xmlns:a="http://schemas.openxmlformats.org/drawingml/2006/main" prst="rect">
             <a:avLst/>
@@ -8614,9 +8620,9 @@
           <a:lstStyle xmlns:a="http://schemas.openxmlformats.org/drawingml/2006/main"/>
           <a:p xmlns:a="http://schemas.openxmlformats.org/drawingml/2006/main">
             <a:pPr algn="ctr">
-              <a:defRPr sz="1350" b="1">
-                <a:solidFill>
-                  <a:srgbClr val="FFFFFF"/>
+              <a:defRPr sz="1125" b="1">
+                <a:solidFill>
+                  <a:srgbClr val="2C6E73"/>
                 </a:solidFill>
                 <a:latin typeface="Arial"/>
                 <a:ea typeface="Arial"/>
@@ -8624,9 +8630,9 @@
               </a:defRPr>
             </a:pPr>
             <a:r>
-              <a:rPr sz="1350" b="1">
-                <a:solidFill>
-                  <a:srgbClr val="FFFFFF"/>
+              <a:rPr sz="1125" b="1">
+                <a:solidFill>
+                  <a:srgbClr val="2C6E73"/>
                 </a:solidFill>
                 <a:latin typeface="Arial"/>
                 <a:ea typeface="Arial"/>
@@ -8642,19 +8648,19 @@
           <p:cNvPr id="19" name="">
             <a:extLst xmlns:a="http://schemas.openxmlformats.org/drawingml/2006/main">
               <a:ext uri="{FF2B5EF4-FFF2-40B4-BE49-F238E27FC236}">
-                <a16:creationId xmlns:a16="http://schemas.microsoft.com/office/drawing/2014/main" id="{C7E98D6E-8459-425B-BC50-A0B0F748BB99}"/>
-              </a:ext>
-            </a:extLst>
-          </p:cNvPr>
-          <p:cNvSpPr>
-            <a:spLocks xmlns:a="http://schemas.openxmlformats.org/drawingml/2006/main" noGrp="1"/>
-          </p:cNvSpPr>
-          <p:nvPr/>
-        </p:nvSpPr>
-        <p:spPr>
-          <a:xfrm xmlns:a="http://schemas.openxmlformats.org/drawingml/2006/main">
-            <a:off x="1714500" y="3667125"/>
-            <a:ext cx="9429750" cy="609600"/>
+                <a16:creationId xmlns:a16="http://schemas.microsoft.com/office/drawing/2014/main" id="{BB993C46-3B3A-4849-98A1-565A44EBA606}"/>
+              </a:ext>
+            </a:extLst>
+          </p:cNvPr>
+          <p:cNvSpPr>
+            <a:spLocks xmlns:a="http://schemas.openxmlformats.org/drawingml/2006/main" noGrp="1"/>
+          </p:cNvSpPr>
+          <p:nvPr/>
+        </p:nvSpPr>
+        <p:spPr>
+          <a:xfrm xmlns:a="http://schemas.openxmlformats.org/drawingml/2006/main">
+            <a:off x="1714500" y="3867150"/>
+            <a:ext cx="9525000" cy="809625"/>
           </a:xfrm>
           <a:prstGeom xmlns:a="http://schemas.openxmlformats.org/drawingml/2006/main" prst="rect">
             <a:avLst/>
@@ -8671,7 +8677,7 @@
           <a:lstStyle xmlns:a="http://schemas.openxmlformats.org/drawingml/2006/main"/>
           <a:p xmlns:a="http://schemas.openxmlformats.org/drawingml/2006/main">
             <a:pPr algn="l">
-              <a:defRPr sz="1500" b="0">
+              <a:defRPr sz="1725" b="0">
                 <a:solidFill>
                   <a:srgbClr val="17253A"/>
                 </a:solidFill>
@@ -8681,7 +8687,7 @@
               </a:defRPr>
             </a:pPr>
             <a:r>
-              <a:rPr sz="1500" b="0">
+              <a:rPr sz="1725" b="0">
                 <a:solidFill>
                   <a:srgbClr val="17253A"/>
                 </a:solidFill>
@@ -8689,7 +8695,7 @@
                 <a:ea typeface="Arial"/>
                 <a:cs typeface="Arial"/>
               </a:rPr>
-              <a:t>Complete the calculation: 42.</a:t>
+              <a:t>Common factors: 1, 2, 3, 6, 7, 14, 21, 42</a:t>
             </a:r>
           </a:p>
         </p:txBody>
@@ -8699,28 +8705,30 @@
           <p:cNvPr id="20" name="">
             <a:extLst xmlns:a="http://schemas.openxmlformats.org/drawingml/2006/main">
               <a:ext uri="{FF2B5EF4-FFF2-40B4-BE49-F238E27FC236}">
-                <a16:creationId xmlns:a16="http://schemas.microsoft.com/office/drawing/2014/main" id="{3B6959B2-E9B1-4B8E-B866-C346C1426477}"/>
-              </a:ext>
-            </a:extLst>
-          </p:cNvPr>
-          <p:cNvSpPr>
-            <a:spLocks xmlns:a="http://schemas.openxmlformats.org/drawingml/2006/main" noGrp="1"/>
-          </p:cNvSpPr>
-          <p:nvPr/>
-        </p:nvSpPr>
-        <p:spPr>
-          <a:xfrm xmlns:a="http://schemas.openxmlformats.org/drawingml/2006/main">
-            <a:off x="1000125" y="4476750"/>
-            <a:ext cx="476250" cy="476250"/>
-          </a:xfrm>
-          <a:prstGeom xmlns:a="http://schemas.openxmlformats.org/drawingml/2006/main" prst="ellipse">
+                <a16:creationId xmlns:a16="http://schemas.microsoft.com/office/drawing/2014/main" id="{D9C701E0-2138-4A99-B0CB-3FB3AE212FA3}"/>
+              </a:ext>
+            </a:extLst>
+          </p:cNvPr>
+          <p:cNvSpPr>
+            <a:spLocks xmlns:a="http://schemas.openxmlformats.org/drawingml/2006/main" noGrp="1"/>
+          </p:cNvSpPr>
+          <p:nvPr/>
+        </p:nvSpPr>
+        <p:spPr>
+          <a:xfrm xmlns:a="http://schemas.openxmlformats.org/drawingml/2006/main">
+            <a:off x="1714500" y="4695825"/>
+            <a:ext cx="9334500" cy="9525"/>
+          </a:xfrm>
+          <a:prstGeom xmlns:a="http://schemas.openxmlformats.org/drawingml/2006/main" prst="rect">
             <a:avLst/>
           </a:prstGeom>
           <a:solidFill xmlns:a="http://schemas.openxmlformats.org/drawingml/2006/main">
-            <a:srgbClr val="2C6E73"/>
+            <a:srgbClr val="D9E0E6"/>
           </a:solidFill>
           <a:ln xmlns:a="http://schemas.openxmlformats.org/drawingml/2006/main" w="0">
-            <a:noFill/>
+            <a:solidFill>
+              <a:srgbClr val="D9E0E6"/>
+            </a:solidFill>
           </a:ln>
         </p:spPr>
       </p:sp>
@@ -8729,19 +8737,19 @@
           <p:cNvPr id="21" name="">
             <a:extLst xmlns:a="http://schemas.openxmlformats.org/drawingml/2006/main">
               <a:ext uri="{FF2B5EF4-FFF2-40B4-BE49-F238E27FC236}">
-                <a16:creationId xmlns:a16="http://schemas.microsoft.com/office/drawing/2014/main" id="{9F53044E-8D72-4C2F-9D15-1DF10D214971}"/>
-              </a:ext>
-            </a:extLst>
-          </p:cNvPr>
-          <p:cNvSpPr>
-            <a:spLocks xmlns:a="http://schemas.openxmlformats.org/drawingml/2006/main" noGrp="1"/>
-          </p:cNvSpPr>
-          <p:nvPr/>
-        </p:nvSpPr>
-        <p:spPr>
-          <a:xfrm xmlns:a="http://schemas.openxmlformats.org/drawingml/2006/main">
-            <a:off x="1000125" y="4505325"/>
-            <a:ext cx="476250" cy="419100"/>
+                <a16:creationId xmlns:a16="http://schemas.microsoft.com/office/drawing/2014/main" id="{63231DB7-9343-4049-ACAE-D3A0BA432A1E}"/>
+              </a:ext>
+            </a:extLst>
+          </p:cNvPr>
+          <p:cNvSpPr>
+            <a:spLocks xmlns:a="http://schemas.openxmlformats.org/drawingml/2006/main" noGrp="1"/>
+          </p:cNvSpPr>
+          <p:nvPr/>
+        </p:nvSpPr>
+        <p:spPr>
+          <a:xfrm xmlns:a="http://schemas.openxmlformats.org/drawingml/2006/main">
+            <a:off x="1162050" y="4829175"/>
+            <a:ext cx="400050" cy="400050"/>
           </a:xfrm>
           <a:prstGeom xmlns:a="http://schemas.openxmlformats.org/drawingml/2006/main" prst="rect">
             <a:avLst/>
@@ -8758,9 +8766,9 @@
           <a:lstStyle xmlns:a="http://schemas.openxmlformats.org/drawingml/2006/main"/>
           <a:p xmlns:a="http://schemas.openxmlformats.org/drawingml/2006/main">
             <a:pPr algn="ctr">
-              <a:defRPr sz="1350" b="1">
-                <a:solidFill>
-                  <a:srgbClr val="FFFFFF"/>
+              <a:defRPr sz="1125" b="1">
+                <a:solidFill>
+                  <a:srgbClr val="2F785D"/>
                 </a:solidFill>
                 <a:latin typeface="Arial"/>
                 <a:ea typeface="Arial"/>
@@ -8768,9 +8776,9 @@
               </a:defRPr>
             </a:pPr>
             <a:r>
-              <a:rPr sz="1350" b="1">
-                <a:solidFill>
-                  <a:srgbClr val="FFFFFF"/>
+              <a:rPr sz="1125" b="1">
+                <a:solidFill>
+                  <a:srgbClr val="2F785D"/>
                 </a:solidFill>
                 <a:latin typeface="Arial"/>
                 <a:ea typeface="Arial"/>
@@ -8786,19 +8794,19 @@
           <p:cNvPr id="22" name="">
             <a:extLst xmlns:a="http://schemas.openxmlformats.org/drawingml/2006/main">
               <a:ext uri="{FF2B5EF4-FFF2-40B4-BE49-F238E27FC236}">
-                <a16:creationId xmlns:a16="http://schemas.microsoft.com/office/drawing/2014/main" id="{9D591E44-175B-4A02-BD8D-958F26320F58}"/>
-              </a:ext>
-            </a:extLst>
-          </p:cNvPr>
-          <p:cNvSpPr>
-            <a:spLocks xmlns:a="http://schemas.openxmlformats.org/drawingml/2006/main" noGrp="1"/>
-          </p:cNvSpPr>
-          <p:nvPr/>
-        </p:nvSpPr>
-        <p:spPr>
-          <a:xfrm xmlns:a="http://schemas.openxmlformats.org/drawingml/2006/main">
-            <a:off x="1714500" y="4410075"/>
-            <a:ext cx="9429750" cy="609600"/>
+                <a16:creationId xmlns:a16="http://schemas.microsoft.com/office/drawing/2014/main" id="{602C326D-D910-47FB-8FBE-932D6DA895A4}"/>
+              </a:ext>
+            </a:extLst>
+          </p:cNvPr>
+          <p:cNvSpPr>
+            <a:spLocks xmlns:a="http://schemas.openxmlformats.org/drawingml/2006/main" noGrp="1"/>
+          </p:cNvSpPr>
+          <p:nvPr/>
+        </p:nvSpPr>
+        <p:spPr>
+          <a:xfrm xmlns:a="http://schemas.openxmlformats.org/drawingml/2006/main">
+            <a:off x="1714500" y="4743450"/>
+            <a:ext cx="9525000" cy="809625"/>
           </a:xfrm>
           <a:prstGeom xmlns:a="http://schemas.openxmlformats.org/drawingml/2006/main" prst="rect">
             <a:avLst/>
@@ -8815,7 +8823,7 @@
           <a:lstStyle xmlns:a="http://schemas.openxmlformats.org/drawingml/2006/main"/>
           <a:p xmlns:a="http://schemas.openxmlformats.org/drawingml/2006/main">
             <a:pPr algn="l">
-              <a:defRPr sz="1500" b="1">
+              <a:defRPr sz="1725" b="1">
                 <a:solidFill>
                   <a:srgbClr val="2F785D"/>
                 </a:solidFill>
@@ -8825,7 +8833,7 @@
               </a:defRPr>
             </a:pPr>
             <a:r>
-              <a:rPr sz="1500" b="1">
+              <a:rPr sz="1725" b="1">
                 <a:solidFill>
                   <a:srgbClr val="2F785D"/>
                 </a:solidFill>
@@ -8833,7 +8841,7 @@
                 <a:ea typeface="Arial"/>
                 <a:cs typeface="Arial"/>
               </a:rPr>
-              <a:t>Check the result: Check that the list is complete and use it to justify the conclusion.</a:t>
+              <a:t>Highest common factor = 42</a:t>
             </a:r>
           </a:p>
         </p:txBody>
@@ -8841,7 +8849,7 @@
     </p:spTree>
     <p:extLst>
       <p:ext uri="{BB962C8B-B14F-4D97-AF65-F5344CB8AC3E}">
-        <p14:creationId xmlns:p14="http://schemas.microsoft.com/office/powerpoint/2010/main" val="1452036622"/>
+        <p14:creationId xmlns:p14="http://schemas.microsoft.com/office/powerpoint/2010/main" val="1858857672"/>
       </p:ext>
     </p:extLst>
   </p:cSld>
@@ -9134,7 +9142,7 @@
           <p:cNvPr id="15" name="">
             <a:extLst xmlns:a="http://schemas.openxmlformats.org/drawingml/2006/main">
               <a:ext uri="{FF2B5EF4-FFF2-40B4-BE49-F238E27FC236}">
-                <a16:creationId xmlns:a16="http://schemas.microsoft.com/office/drawing/2014/main" id="{6541C66C-6F7E-4D7D-8BD6-1675019A7896}"/>
+                <a16:creationId xmlns:a16="http://schemas.microsoft.com/office/drawing/2014/main" id="{8B9BDE1F-8A4A-4A99-A587-2BF5CFE93F48}"/>
               </a:ext>
             </a:extLst>
           </p:cNvPr>
@@ -9166,7 +9174,7 @@
           <p:cNvPr id="2" name="">
             <a:extLst xmlns:a="http://schemas.openxmlformats.org/drawingml/2006/main">
               <a:ext uri="{FF2B5EF4-FFF2-40B4-BE49-F238E27FC236}">
-                <a16:creationId xmlns:a16="http://schemas.microsoft.com/office/drawing/2014/main" id="{66807F64-9FEF-497A-BE73-2449401272D5}"/>
+                <a16:creationId xmlns:a16="http://schemas.microsoft.com/office/drawing/2014/main" id="{8D0DC454-64A4-49D6-A41B-0D6E5D9C4938}"/>
               </a:ext>
             </a:extLst>
           </p:cNvPr>
@@ -9223,7 +9231,7 @@
           <p:cNvPr id="3" name="">
             <a:extLst xmlns:a="http://schemas.openxmlformats.org/drawingml/2006/main">
               <a:ext uri="{FF2B5EF4-FFF2-40B4-BE49-F238E27FC236}">
-                <a16:creationId xmlns:a16="http://schemas.microsoft.com/office/drawing/2014/main" id="{D270F320-C306-4578-B7A5-B2DEFCC427B3}"/>
+                <a16:creationId xmlns:a16="http://schemas.microsoft.com/office/drawing/2014/main" id="{580789D1-2D6F-41EE-9B57-6AB64BFC6D12}"/>
               </a:ext>
             </a:extLst>
           </p:cNvPr>
@@ -9255,7 +9263,7 @@
           <p:cNvPr id="4" name="">
             <a:extLst xmlns:a="http://schemas.openxmlformats.org/drawingml/2006/main">
               <a:ext uri="{FF2B5EF4-FFF2-40B4-BE49-F238E27FC236}">
-                <a16:creationId xmlns:a16="http://schemas.microsoft.com/office/drawing/2014/main" id="{F15D9308-2323-45F5-A6F4-D4B0317CD862}"/>
+                <a16:creationId xmlns:a16="http://schemas.microsoft.com/office/drawing/2014/main" id="{4C85FE9E-BF52-4895-AFFD-EE9E0FEDB989}"/>
               </a:ext>
             </a:extLst>
           </p:cNvPr>
@@ -9312,7 +9320,7 @@
           <p:cNvPr id="5" name="">
             <a:extLst xmlns:a="http://schemas.openxmlformats.org/drawingml/2006/main">
               <a:ext uri="{FF2B5EF4-FFF2-40B4-BE49-F238E27FC236}">
-                <a16:creationId xmlns:a16="http://schemas.microsoft.com/office/drawing/2014/main" id="{CD283C01-044A-4933-8839-71BD51EFA07D}"/>
+                <a16:creationId xmlns:a16="http://schemas.microsoft.com/office/drawing/2014/main" id="{166540E1-0EB7-4BEE-8F60-1135C460C1BF}"/>
               </a:ext>
             </a:extLst>
           </p:cNvPr>
@@ -9369,7 +9377,7 @@
           <p:cNvPr id="6" name="">
             <a:extLst xmlns:a="http://schemas.openxmlformats.org/drawingml/2006/main">
               <a:ext uri="{FF2B5EF4-FFF2-40B4-BE49-F238E27FC236}">
-                <a16:creationId xmlns:a16="http://schemas.microsoft.com/office/drawing/2014/main" id="{134790BD-4B58-439B-81C7-B06D450D28DF}"/>
+                <a16:creationId xmlns:a16="http://schemas.microsoft.com/office/drawing/2014/main" id="{921269FC-6E9B-4566-A565-B70AE3CD5BC1}"/>
               </a:ext>
             </a:extLst>
           </p:cNvPr>
@@ -9426,7 +9434,7 @@
           <p:cNvPr id="7" name="">
             <a:extLst xmlns:a="http://schemas.openxmlformats.org/drawingml/2006/main">
               <a:ext uri="{FF2B5EF4-FFF2-40B4-BE49-F238E27FC236}">
-                <a16:creationId xmlns:a16="http://schemas.microsoft.com/office/drawing/2014/main" id="{EC1AD2BD-3A2A-447A-93F9-EEA63D9E9EBD}"/>
+                <a16:creationId xmlns:a16="http://schemas.microsoft.com/office/drawing/2014/main" id="{A9804E88-2CCE-4F62-8297-42BB71976D3C}"/>
               </a:ext>
             </a:extLst>
           </p:cNvPr>
@@ -9458,7 +9466,7 @@
           <p:cNvPr id="8" name="">
             <a:extLst xmlns:a="http://schemas.openxmlformats.org/drawingml/2006/main">
               <a:ext uri="{FF2B5EF4-FFF2-40B4-BE49-F238E27FC236}">
-                <a16:creationId xmlns:a16="http://schemas.microsoft.com/office/drawing/2014/main" id="{84AB3D09-E810-4069-AD98-DDF6601EEB6B}"/>
+                <a16:creationId xmlns:a16="http://schemas.microsoft.com/office/drawing/2014/main" id="{CD6F8F6C-812D-4952-9DAE-2C5D085CD500}"/>
               </a:ext>
             </a:extLst>
           </p:cNvPr>
@@ -9515,7 +9523,7 @@
           <p:cNvPr id="9" name="">
             <a:extLst xmlns:a="http://schemas.openxmlformats.org/drawingml/2006/main">
               <a:ext uri="{FF2B5EF4-FFF2-40B4-BE49-F238E27FC236}">
-                <a16:creationId xmlns:a16="http://schemas.microsoft.com/office/drawing/2014/main" id="{60DB0A3D-A248-40D1-8B05-79458536C8BD}"/>
+                <a16:creationId xmlns:a16="http://schemas.microsoft.com/office/drawing/2014/main" id="{13FEF9B6-4C7B-4006-A203-93C38FCEDFB1}"/>
               </a:ext>
             </a:extLst>
           </p:cNvPr>
@@ -9572,7 +9580,7 @@
           <p:cNvPr id="10" name="">
             <a:extLst xmlns:a="http://schemas.openxmlformats.org/drawingml/2006/main">
               <a:ext uri="{FF2B5EF4-FFF2-40B4-BE49-F238E27FC236}">
-                <a16:creationId xmlns:a16="http://schemas.microsoft.com/office/drawing/2014/main" id="{E26AF841-757A-40CC-856A-E38264AF82C7}"/>
+                <a16:creationId xmlns:a16="http://schemas.microsoft.com/office/drawing/2014/main" id="{52AC5FC5-F4FC-4929-AD5A-01705817C76F}"/>
               </a:ext>
             </a:extLst>
           </p:cNvPr>
@@ -9629,7 +9637,7 @@
           <p:cNvPr id="11" name="">
             <a:extLst xmlns:a="http://schemas.openxmlformats.org/drawingml/2006/main">
               <a:ext uri="{FF2B5EF4-FFF2-40B4-BE49-F238E27FC236}">
-                <a16:creationId xmlns:a16="http://schemas.microsoft.com/office/drawing/2014/main" id="{8ADF2AB0-BC10-48DF-9C00-EA313CF9EBF6}"/>
+                <a16:creationId xmlns:a16="http://schemas.microsoft.com/office/drawing/2014/main" id="{AE7B099E-0559-4AB2-AE2E-B4111E3B277E}"/>
               </a:ext>
             </a:extLst>
           </p:cNvPr>
@@ -9686,7 +9694,7 @@
           <p:cNvPr id="12" name="">
             <a:extLst xmlns:a="http://schemas.openxmlformats.org/drawingml/2006/main">
               <a:ext uri="{FF2B5EF4-FFF2-40B4-BE49-F238E27FC236}">
-                <a16:creationId xmlns:a16="http://schemas.microsoft.com/office/drawing/2014/main" id="{C90E105C-90B4-4116-9967-CAEAD4F66B17}"/>
+                <a16:creationId xmlns:a16="http://schemas.microsoft.com/office/drawing/2014/main" id="{2A495840-25E3-4DDE-89FF-16A797264ECF}"/>
               </a:ext>
             </a:extLst>
           </p:cNvPr>
@@ -9718,7 +9726,7 @@
           <p:cNvPr id="13" name="">
             <a:extLst xmlns:a="http://schemas.openxmlformats.org/drawingml/2006/main">
               <a:ext uri="{FF2B5EF4-FFF2-40B4-BE49-F238E27FC236}">
-                <a16:creationId xmlns:a16="http://schemas.microsoft.com/office/drawing/2014/main" id="{3EC68A15-9924-4C23-8C97-6100EAC24CA8}"/>
+                <a16:creationId xmlns:a16="http://schemas.microsoft.com/office/drawing/2014/main" id="{6AAF83DF-9B31-479D-A8DA-419734C02CAC}"/>
               </a:ext>
             </a:extLst>
           </p:cNvPr>
@@ -9775,7 +9783,7 @@
           <p:cNvPr id="14" name="">
             <a:extLst xmlns:a="http://schemas.openxmlformats.org/drawingml/2006/main">
               <a:ext uri="{FF2B5EF4-FFF2-40B4-BE49-F238E27FC236}">
-                <a16:creationId xmlns:a16="http://schemas.microsoft.com/office/drawing/2014/main" id="{6D48BFFC-299A-4ABA-AAE0-3BB33435BBC1}"/>
+                <a16:creationId xmlns:a16="http://schemas.microsoft.com/office/drawing/2014/main" id="{B154F5B0-280D-422B-9CD1-EF961A95EE93}"/>
               </a:ext>
             </a:extLst>
           </p:cNvPr>
@@ -9830,7 +9838,7 @@
     </p:spTree>
     <p:extLst>
       <p:ext uri="{BB962C8B-B14F-4D97-AF65-F5344CB8AC3E}">
-        <p14:creationId xmlns:p14="http://schemas.microsoft.com/office/powerpoint/2010/main" val="246305454"/>
+        <p14:creationId xmlns:p14="http://schemas.microsoft.com/office/powerpoint/2010/main" val="1251337523"/>
       </p:ext>
     </p:extLst>
   </p:cSld>
@@ -10031,7 +10039,7 @@
           <p:cNvPr id="16" name="">
             <a:extLst xmlns:a="http://schemas.openxmlformats.org/drawingml/2006/main">
               <a:ext uri="{FF2B5EF4-FFF2-40B4-BE49-F238E27FC236}">
-                <a16:creationId xmlns:a16="http://schemas.microsoft.com/office/drawing/2014/main" id="{FB8DDA18-E3D5-46F5-98D0-D1CEE4FC42DD}"/>
+                <a16:creationId xmlns:a16="http://schemas.microsoft.com/office/drawing/2014/main" id="{79B39A42-499A-42C5-8D85-51914F3544F7}"/>
               </a:ext>
             </a:extLst>
           </p:cNvPr>
@@ -10063,7 +10071,7 @@
           <p:cNvPr id="2" name="">
             <a:extLst xmlns:a="http://schemas.openxmlformats.org/drawingml/2006/main">
               <a:ext uri="{FF2B5EF4-FFF2-40B4-BE49-F238E27FC236}">
-                <a16:creationId xmlns:a16="http://schemas.microsoft.com/office/drawing/2014/main" id="{A9F6ED9C-B0FF-4FB9-BA68-E68F8D4D3306}"/>
+                <a16:creationId xmlns:a16="http://schemas.microsoft.com/office/drawing/2014/main" id="{9D7C581E-D149-485B-ADBB-088F449166C2}"/>
               </a:ext>
             </a:extLst>
           </p:cNvPr>
@@ -10120,7 +10128,7 @@
           <p:cNvPr id="3" name="">
             <a:extLst xmlns:a="http://schemas.openxmlformats.org/drawingml/2006/main">
               <a:ext uri="{FF2B5EF4-FFF2-40B4-BE49-F238E27FC236}">
-                <a16:creationId xmlns:a16="http://schemas.microsoft.com/office/drawing/2014/main" id="{0EBBB0F6-6EB1-4928-A555-E6B724D8A3AE}"/>
+                <a16:creationId xmlns:a16="http://schemas.microsoft.com/office/drawing/2014/main" id="{92830266-3CF0-4BB7-AF03-3B11D6618FB0}"/>
               </a:ext>
             </a:extLst>
           </p:cNvPr>
@@ -10152,7 +10160,7 @@
           <p:cNvPr id="4" name="">
             <a:extLst xmlns:a="http://schemas.openxmlformats.org/drawingml/2006/main">
               <a:ext uri="{FF2B5EF4-FFF2-40B4-BE49-F238E27FC236}">
-                <a16:creationId xmlns:a16="http://schemas.microsoft.com/office/drawing/2014/main" id="{5FFC10A0-CEAB-479E-BA50-3228E1104E6D}"/>
+                <a16:creationId xmlns:a16="http://schemas.microsoft.com/office/drawing/2014/main" id="{4E6E9CC1-50DD-4248-9FE8-1EEF6517CCAE}"/>
               </a:ext>
             </a:extLst>
           </p:cNvPr>
@@ -10209,7 +10217,7 @@
           <p:cNvPr id="5" name="">
             <a:extLst xmlns:a="http://schemas.openxmlformats.org/drawingml/2006/main">
               <a:ext uri="{FF2B5EF4-FFF2-40B4-BE49-F238E27FC236}">
-                <a16:creationId xmlns:a16="http://schemas.microsoft.com/office/drawing/2014/main" id="{FC139EED-8C52-4346-AE98-DB2D3913E990}"/>
+                <a16:creationId xmlns:a16="http://schemas.microsoft.com/office/drawing/2014/main" id="{7167ED5E-6A7C-4D58-970D-961C477B2F64}"/>
               </a:ext>
             </a:extLst>
           </p:cNvPr>
@@ -10266,7 +10274,7 @@
           <p:cNvPr id="6" name="">
             <a:extLst xmlns:a="http://schemas.openxmlformats.org/drawingml/2006/main">
               <a:ext uri="{FF2B5EF4-FFF2-40B4-BE49-F238E27FC236}">
-                <a16:creationId xmlns:a16="http://schemas.microsoft.com/office/drawing/2014/main" id="{676EC07C-0049-4A00-A758-5F2086C7C5DB}"/>
+                <a16:creationId xmlns:a16="http://schemas.microsoft.com/office/drawing/2014/main" id="{5167B9D3-E7C4-467F-91D5-631C5A9CB2E0}"/>
               </a:ext>
             </a:extLst>
           </p:cNvPr>
@@ -10323,7 +10331,7 @@
           <p:cNvPr id="7" name="">
             <a:extLst xmlns:a="http://schemas.openxmlformats.org/drawingml/2006/main">
               <a:ext uri="{FF2B5EF4-FFF2-40B4-BE49-F238E27FC236}">
-                <a16:creationId xmlns:a16="http://schemas.microsoft.com/office/drawing/2014/main" id="{1AB39C2B-DC4C-4007-B214-BE3BF8B18710}"/>
+                <a16:creationId xmlns:a16="http://schemas.microsoft.com/office/drawing/2014/main" id="{2BEC44FE-E1AF-4953-BA9C-74B27FF62FE5}"/>
               </a:ext>
             </a:extLst>
           </p:cNvPr>
@@ -10355,7 +10363,7 @@
           <p:cNvPr id="8" name="">
             <a:extLst xmlns:a="http://schemas.openxmlformats.org/drawingml/2006/main">
               <a:ext uri="{FF2B5EF4-FFF2-40B4-BE49-F238E27FC236}">
-                <a16:creationId xmlns:a16="http://schemas.microsoft.com/office/drawing/2014/main" id="{F39BC769-5D21-4A68-8522-FD8046902CE7}"/>
+                <a16:creationId xmlns:a16="http://schemas.microsoft.com/office/drawing/2014/main" id="{424BD17D-F832-4198-9354-6B06EE4E9AD3}"/>
               </a:ext>
             </a:extLst>
           </p:cNvPr>
@@ -10412,7 +10420,7 @@
           <p:cNvPr id="9" name="">
             <a:extLst xmlns:a="http://schemas.openxmlformats.org/drawingml/2006/main">
               <a:ext uri="{FF2B5EF4-FFF2-40B4-BE49-F238E27FC236}">
-                <a16:creationId xmlns:a16="http://schemas.microsoft.com/office/drawing/2014/main" id="{22BA7D51-261B-40EF-A0C3-2D6A9A565598}"/>
+                <a16:creationId xmlns:a16="http://schemas.microsoft.com/office/drawing/2014/main" id="{31ECD410-2A9C-4EA1-BACA-C69E72BC5571}"/>
               </a:ext>
             </a:extLst>
           </p:cNvPr>
@@ -10469,7 +10477,7 @@
           <p:cNvPr id="10" name="">
             <a:extLst xmlns:a="http://schemas.openxmlformats.org/drawingml/2006/main">
               <a:ext uri="{FF2B5EF4-FFF2-40B4-BE49-F238E27FC236}">
-                <a16:creationId xmlns:a16="http://schemas.microsoft.com/office/drawing/2014/main" id="{66DA5E8A-95A9-46DF-B535-86825AD716A4}"/>
+                <a16:creationId xmlns:a16="http://schemas.microsoft.com/office/drawing/2014/main" id="{9A99AF62-AAC4-4AC1-9E64-608F7906082F}"/>
               </a:ext>
             </a:extLst>
           </p:cNvPr>
@@ -10526,7 +10534,7 @@
           <p:cNvPr id="11" name="">
             <a:extLst xmlns:a="http://schemas.openxmlformats.org/drawingml/2006/main">
               <a:ext uri="{FF2B5EF4-FFF2-40B4-BE49-F238E27FC236}">
-                <a16:creationId xmlns:a16="http://schemas.microsoft.com/office/drawing/2014/main" id="{089F6DD3-080A-4C4E-9EFB-BEA459ACE5CB}"/>
+                <a16:creationId xmlns:a16="http://schemas.microsoft.com/office/drawing/2014/main" id="{C7C347CF-A1A9-4EA6-BD9C-FC5AFAD472F7}"/>
               </a:ext>
             </a:extLst>
           </p:cNvPr>
@@ -10583,7 +10591,7 @@
           <p:cNvPr id="12" name="">
             <a:extLst xmlns:a="http://schemas.openxmlformats.org/drawingml/2006/main">
               <a:ext uri="{FF2B5EF4-FFF2-40B4-BE49-F238E27FC236}">
-                <a16:creationId xmlns:a16="http://schemas.microsoft.com/office/drawing/2014/main" id="{463A2654-ACCA-4060-887D-74C6BA357A10}"/>
+                <a16:creationId xmlns:a16="http://schemas.microsoft.com/office/drawing/2014/main" id="{AD462D8D-A29F-4920-8924-62E2224AF89E}"/>
               </a:ext>
             </a:extLst>
           </p:cNvPr>
@@ -10640,7 +10648,7 @@
           <p:cNvPr id="13" name="">
             <a:extLst xmlns:a="http://schemas.openxmlformats.org/drawingml/2006/main">
               <a:ext uri="{FF2B5EF4-FFF2-40B4-BE49-F238E27FC236}">
-                <a16:creationId xmlns:a16="http://schemas.microsoft.com/office/drawing/2014/main" id="{B17000C5-04FB-48D7-A56F-45AC3DBA6908}"/>
+                <a16:creationId xmlns:a16="http://schemas.microsoft.com/office/drawing/2014/main" id="{066D41FF-7FCD-4D30-896B-92FF459D1834}"/>
               </a:ext>
             </a:extLst>
           </p:cNvPr>
@@ -10697,7 +10705,7 @@
           <p:cNvPr id="14" name="">
             <a:extLst xmlns:a="http://schemas.openxmlformats.org/drawingml/2006/main">
               <a:ext uri="{FF2B5EF4-FFF2-40B4-BE49-F238E27FC236}">
-                <a16:creationId xmlns:a16="http://schemas.microsoft.com/office/drawing/2014/main" id="{4F4A103F-90E7-43B7-9705-982AAB638F99}"/>
+                <a16:creationId xmlns:a16="http://schemas.microsoft.com/office/drawing/2014/main" id="{1302E36A-43A7-4DBB-9439-5E8E29C5C526}"/>
               </a:ext>
             </a:extLst>
           </p:cNvPr>
@@ -10754,7 +10762,7 @@
           <p:cNvPr id="15" name="">
             <a:extLst xmlns:a="http://schemas.openxmlformats.org/drawingml/2006/main">
               <a:ext uri="{FF2B5EF4-FFF2-40B4-BE49-F238E27FC236}">
-                <a16:creationId xmlns:a16="http://schemas.microsoft.com/office/drawing/2014/main" id="{9B06BA52-1AEF-45BE-A05A-35E8D94E78D6}"/>
+                <a16:creationId xmlns:a16="http://schemas.microsoft.com/office/drawing/2014/main" id="{E7D735F7-C3FB-4A6E-B631-0C78BD203632}"/>
               </a:ext>
             </a:extLst>
           </p:cNvPr>
@@ -10809,7 +10817,7 @@
     </p:spTree>
     <p:extLst>
       <p:ext uri="{BB962C8B-B14F-4D97-AF65-F5344CB8AC3E}">
-        <p14:creationId xmlns:p14="http://schemas.microsoft.com/office/powerpoint/2010/main" val="1040621515"/>
+        <p14:creationId xmlns:p14="http://schemas.microsoft.com/office/powerpoint/2010/main" val="1036205106"/>
       </p:ext>
     </p:extLst>
   </p:cSld>
@@ -10964,7 +10972,7 @@
           <p:cNvPr id="16" name="">
             <a:extLst xmlns:a="http://schemas.openxmlformats.org/drawingml/2006/main">
               <a:ext uri="{FF2B5EF4-FFF2-40B4-BE49-F238E27FC236}">
-                <a16:creationId xmlns:a16="http://schemas.microsoft.com/office/drawing/2014/main" id="{4B84EB21-4527-4CE3-AD00-94901DE1EC5E}"/>
+                <a16:creationId xmlns:a16="http://schemas.microsoft.com/office/drawing/2014/main" id="{2D34C212-3E87-49D4-A2F5-F247D0F88D69}"/>
               </a:ext>
             </a:extLst>
           </p:cNvPr>
@@ -10996,7 +11004,7 @@
           <p:cNvPr id="2" name="">
             <a:extLst xmlns:a="http://schemas.openxmlformats.org/drawingml/2006/main">
               <a:ext uri="{FF2B5EF4-FFF2-40B4-BE49-F238E27FC236}">
-                <a16:creationId xmlns:a16="http://schemas.microsoft.com/office/drawing/2014/main" id="{029DA34C-9925-4E72-A782-4743698D1EB2}"/>
+                <a16:creationId xmlns:a16="http://schemas.microsoft.com/office/drawing/2014/main" id="{2BFE32B9-DD19-4046-ADA0-402FD66BC05E}"/>
               </a:ext>
             </a:extLst>
           </p:cNvPr>
@@ -11053,7 +11061,7 @@
           <p:cNvPr id="3" name="">
             <a:extLst xmlns:a="http://schemas.openxmlformats.org/drawingml/2006/main">
               <a:ext uri="{FF2B5EF4-FFF2-40B4-BE49-F238E27FC236}">
-                <a16:creationId xmlns:a16="http://schemas.microsoft.com/office/drawing/2014/main" id="{8E062A96-7904-446F-8A02-5B15811F69D9}"/>
+                <a16:creationId xmlns:a16="http://schemas.microsoft.com/office/drawing/2014/main" id="{CCCF3419-57ED-4B1D-AB49-1E144929E716}"/>
               </a:ext>
             </a:extLst>
           </p:cNvPr>
@@ -11085,7 +11093,7 @@
           <p:cNvPr id="4" name="">
             <a:extLst xmlns:a="http://schemas.openxmlformats.org/drawingml/2006/main">
               <a:ext uri="{FF2B5EF4-FFF2-40B4-BE49-F238E27FC236}">
-                <a16:creationId xmlns:a16="http://schemas.microsoft.com/office/drawing/2014/main" id="{ED2011EB-1872-46A9-914A-1718A7172CF7}"/>
+                <a16:creationId xmlns:a16="http://schemas.microsoft.com/office/drawing/2014/main" id="{480C38BF-1336-4F55-899E-9C6E08A86ED7}"/>
               </a:ext>
             </a:extLst>
           </p:cNvPr>
@@ -11142,7 +11150,7 @@
           <p:cNvPr id="5" name="">
             <a:extLst xmlns:a="http://schemas.openxmlformats.org/drawingml/2006/main">
               <a:ext uri="{FF2B5EF4-FFF2-40B4-BE49-F238E27FC236}">
-                <a16:creationId xmlns:a16="http://schemas.microsoft.com/office/drawing/2014/main" id="{0A5A89D6-3E5C-48B4-BD0D-9B43FB44E193}"/>
+                <a16:creationId xmlns:a16="http://schemas.microsoft.com/office/drawing/2014/main" id="{673FEF3A-411D-4BEC-B13E-3B4D292B51E2}"/>
               </a:ext>
             </a:extLst>
           </p:cNvPr>
@@ -11199,7 +11207,7 @@
           <p:cNvPr id="6" name="">
             <a:extLst xmlns:a="http://schemas.openxmlformats.org/drawingml/2006/main">
               <a:ext uri="{FF2B5EF4-FFF2-40B4-BE49-F238E27FC236}">
-                <a16:creationId xmlns:a16="http://schemas.microsoft.com/office/drawing/2014/main" id="{16366B35-2A97-4C0A-B54C-C64645CB7D70}"/>
+                <a16:creationId xmlns:a16="http://schemas.microsoft.com/office/drawing/2014/main" id="{9BA21325-9496-461F-8A07-18D0B0FD2B8B}"/>
               </a:ext>
             </a:extLst>
           </p:cNvPr>
@@ -11256,7 +11264,7 @@
           <p:cNvPr id="7" name="">
             <a:extLst xmlns:a="http://schemas.openxmlformats.org/drawingml/2006/main">
               <a:ext uri="{FF2B5EF4-FFF2-40B4-BE49-F238E27FC236}">
-                <a16:creationId xmlns:a16="http://schemas.microsoft.com/office/drawing/2014/main" id="{892935D4-7915-41A9-9D45-4FB8111144CD}"/>
+                <a16:creationId xmlns:a16="http://schemas.microsoft.com/office/drawing/2014/main" id="{AA178AE6-4FEC-4CB1-B2BB-17E8F0580654}"/>
               </a:ext>
             </a:extLst>
           </p:cNvPr>
@@ -11288,7 +11296,7 @@
           <p:cNvPr id="8" name="">
             <a:extLst xmlns:a="http://schemas.openxmlformats.org/drawingml/2006/main">
               <a:ext uri="{FF2B5EF4-FFF2-40B4-BE49-F238E27FC236}">
-                <a16:creationId xmlns:a16="http://schemas.microsoft.com/office/drawing/2014/main" id="{8878A4D6-30BD-4EE2-81C8-791FAD8DC6E3}"/>
+                <a16:creationId xmlns:a16="http://schemas.microsoft.com/office/drawing/2014/main" id="{E2BCB3B6-E550-4A78-BE7D-7E10EF98FFCA}"/>
               </a:ext>
             </a:extLst>
           </p:cNvPr>
@@ -11345,7 +11353,7 @@
           <p:cNvPr id="9" name="">
             <a:extLst xmlns:a="http://schemas.openxmlformats.org/drawingml/2006/main">
               <a:ext uri="{FF2B5EF4-FFF2-40B4-BE49-F238E27FC236}">
-                <a16:creationId xmlns:a16="http://schemas.microsoft.com/office/drawing/2014/main" id="{182203F8-228B-4E14-9C24-D2984C053A7A}"/>
+                <a16:creationId xmlns:a16="http://schemas.microsoft.com/office/drawing/2014/main" id="{8B6DF8EC-7FD6-4BBF-883F-40C13ED4CAB6}"/>
               </a:ext>
             </a:extLst>
           </p:cNvPr>
@@ -11406,7 +11414,7 @@
           <p:nvPr/>
         </p:nvPicPr>
         <p:blipFill>
-          <a:blip xmlns:r="http://schemas.openxmlformats.org/officeDocument/2006/relationships" xmlns:a="http://schemas.openxmlformats.org/drawingml/2006/main" r:embed="R4dbaaaa1c76a45f9"/>
+          <a:blip xmlns:r="http://schemas.openxmlformats.org/officeDocument/2006/relationships" xmlns:a="http://schemas.openxmlformats.org/drawingml/2006/main" r:embed="R731770b47b824820"/>
           <a:stretch xmlns:a="http://schemas.openxmlformats.org/drawingml/2006/main"/>
         </p:blipFill>
         <p:spPr>
@@ -11424,7 +11432,7 @@
           <p:cNvPr id="11" name="">
             <a:extLst xmlns:a="http://schemas.openxmlformats.org/drawingml/2006/main">
               <a:ext uri="{FF2B5EF4-FFF2-40B4-BE49-F238E27FC236}">
-                <a16:creationId xmlns:a16="http://schemas.microsoft.com/office/drawing/2014/main" id="{5C35A8FA-07D8-4916-8AE9-CFA4A62344DB}"/>
+                <a16:creationId xmlns:a16="http://schemas.microsoft.com/office/drawing/2014/main" id="{B1CC9CF0-B333-4060-AF0D-33ADA1ADF322}"/>
               </a:ext>
             </a:extLst>
           </p:cNvPr>
@@ -11481,7 +11489,7 @@
           <p:cNvPr id="12" name="">
             <a:extLst xmlns:a="http://schemas.openxmlformats.org/drawingml/2006/main">
               <a:ext uri="{FF2B5EF4-FFF2-40B4-BE49-F238E27FC236}">
-                <a16:creationId xmlns:a16="http://schemas.microsoft.com/office/drawing/2014/main" id="{47F8E676-C988-403B-AE85-B4AF9BDA74EC}"/>
+                <a16:creationId xmlns:a16="http://schemas.microsoft.com/office/drawing/2014/main" id="{8A942F8F-743A-4216-A0CC-48567C48E75E}"/>
               </a:ext>
             </a:extLst>
           </p:cNvPr>
@@ -11538,7 +11546,7 @@
           <p:cNvPr id="13" name="">
             <a:extLst xmlns:a="http://schemas.openxmlformats.org/drawingml/2006/main">
               <a:ext uri="{FF2B5EF4-FFF2-40B4-BE49-F238E27FC236}">
-                <a16:creationId xmlns:a16="http://schemas.microsoft.com/office/drawing/2014/main" id="{DC0E84AE-75A8-4282-B831-BCEAB09023A3}"/>
+                <a16:creationId xmlns:a16="http://schemas.microsoft.com/office/drawing/2014/main" id="{19A59B84-1049-4D7B-99B8-D4175CDAFD5D}"/>
               </a:ext>
             </a:extLst>
           </p:cNvPr>
@@ -11570,7 +11578,7 @@
           <p:cNvPr id="14" name="">
             <a:extLst xmlns:a="http://schemas.openxmlformats.org/drawingml/2006/main">
               <a:ext uri="{FF2B5EF4-FFF2-40B4-BE49-F238E27FC236}">
-                <a16:creationId xmlns:a16="http://schemas.microsoft.com/office/drawing/2014/main" id="{995F5D62-7EB3-4424-9402-F76B962DE8EE}"/>
+                <a16:creationId xmlns:a16="http://schemas.microsoft.com/office/drawing/2014/main" id="{04240BAD-D0E6-4C86-B8C0-9CF8871389E3}"/>
               </a:ext>
             </a:extLst>
           </p:cNvPr>
@@ -11627,7 +11635,7 @@
           <p:cNvPr id="15" name="">
             <a:extLst xmlns:a="http://schemas.openxmlformats.org/drawingml/2006/main">
               <a:ext uri="{FF2B5EF4-FFF2-40B4-BE49-F238E27FC236}">
-                <a16:creationId xmlns:a16="http://schemas.microsoft.com/office/drawing/2014/main" id="{C5A0E309-8F20-40DA-8420-8E4E0B1D683F}"/>
+                <a16:creationId xmlns:a16="http://schemas.microsoft.com/office/drawing/2014/main" id="{326D2418-9E80-47E5-A79C-2C033F913909}"/>
               </a:ext>
             </a:extLst>
           </p:cNvPr>
@@ -11682,7 +11690,7 @@
     </p:spTree>
     <p:extLst>
       <p:ext uri="{BB962C8B-B14F-4D97-AF65-F5344CB8AC3E}">
-        <p14:creationId xmlns:p14="http://schemas.microsoft.com/office/powerpoint/2010/main" val="2137683614"/>
+        <p14:creationId xmlns:p14="http://schemas.microsoft.com/office/powerpoint/2010/main" val="924816768"/>
       </p:ext>
     </p:extLst>
   </p:cSld>
@@ -11837,7 +11845,7 @@
           <p:cNvPr id="23" name="">
             <a:extLst xmlns:a="http://schemas.openxmlformats.org/drawingml/2006/main">
               <a:ext uri="{FF2B5EF4-FFF2-40B4-BE49-F238E27FC236}">
-                <a16:creationId xmlns:a16="http://schemas.microsoft.com/office/drawing/2014/main" id="{864B4EDE-37FB-4BC6-AE48-916E10B8054D}"/>
+                <a16:creationId xmlns:a16="http://schemas.microsoft.com/office/drawing/2014/main" id="{E47F2A9E-0D60-40A1-847A-2905FC893279}"/>
               </a:ext>
             </a:extLst>
           </p:cNvPr>
@@ -11869,7 +11877,7 @@
           <p:cNvPr id="2" name="">
             <a:extLst xmlns:a="http://schemas.openxmlformats.org/drawingml/2006/main">
               <a:ext uri="{FF2B5EF4-FFF2-40B4-BE49-F238E27FC236}">
-                <a16:creationId xmlns:a16="http://schemas.microsoft.com/office/drawing/2014/main" id="{A80BC5FD-168F-43F0-A55B-660C6D7176E2}"/>
+                <a16:creationId xmlns:a16="http://schemas.microsoft.com/office/drawing/2014/main" id="{F33137B0-C8EE-4E1F-8828-990E913CF90C}"/>
               </a:ext>
             </a:extLst>
           </p:cNvPr>
@@ -11926,7 +11934,7 @@
           <p:cNvPr id="3" name="">
             <a:extLst xmlns:a="http://schemas.openxmlformats.org/drawingml/2006/main">
               <a:ext uri="{FF2B5EF4-FFF2-40B4-BE49-F238E27FC236}">
-                <a16:creationId xmlns:a16="http://schemas.microsoft.com/office/drawing/2014/main" id="{608F0B0D-E662-4147-BB45-9B232B8A5E4D}"/>
+                <a16:creationId xmlns:a16="http://schemas.microsoft.com/office/drawing/2014/main" id="{961952CD-48FD-4CA7-99FF-94E121F292D7}"/>
               </a:ext>
             </a:extLst>
           </p:cNvPr>
@@ -11958,7 +11966,7 @@
           <p:cNvPr id="4" name="">
             <a:extLst xmlns:a="http://schemas.openxmlformats.org/drawingml/2006/main">
               <a:ext uri="{FF2B5EF4-FFF2-40B4-BE49-F238E27FC236}">
-                <a16:creationId xmlns:a16="http://schemas.microsoft.com/office/drawing/2014/main" id="{45EE53F7-1473-421B-A2C9-FE3621A13093}"/>
+                <a16:creationId xmlns:a16="http://schemas.microsoft.com/office/drawing/2014/main" id="{42713713-CF21-4753-BDCA-2D65F4FAE31F}"/>
               </a:ext>
             </a:extLst>
           </p:cNvPr>
@@ -12015,7 +12023,7 @@
           <p:cNvPr id="5" name="">
             <a:extLst xmlns:a="http://schemas.openxmlformats.org/drawingml/2006/main">
               <a:ext uri="{FF2B5EF4-FFF2-40B4-BE49-F238E27FC236}">
-                <a16:creationId xmlns:a16="http://schemas.microsoft.com/office/drawing/2014/main" id="{C9BFEA44-B96F-4384-A5B6-148D3C7B6BAB}"/>
+                <a16:creationId xmlns:a16="http://schemas.microsoft.com/office/drawing/2014/main" id="{1DCB09FD-7C0A-4008-B711-FE9CDFC93069}"/>
               </a:ext>
             </a:extLst>
           </p:cNvPr>
@@ -12072,7 +12080,7 @@
           <p:cNvPr id="6" name="">
             <a:extLst xmlns:a="http://schemas.openxmlformats.org/drawingml/2006/main">
               <a:ext uri="{FF2B5EF4-FFF2-40B4-BE49-F238E27FC236}">
-                <a16:creationId xmlns:a16="http://schemas.microsoft.com/office/drawing/2014/main" id="{6B27C6A3-6939-4E9A-95C5-C01AC0B1B6EF}"/>
+                <a16:creationId xmlns:a16="http://schemas.microsoft.com/office/drawing/2014/main" id="{B8266D32-147A-42F9-BB90-C49EBB8A8AE2}"/>
               </a:ext>
             </a:extLst>
           </p:cNvPr>
@@ -12129,7 +12137,7 @@
           <p:cNvPr id="7" name="">
             <a:extLst xmlns:a="http://schemas.openxmlformats.org/drawingml/2006/main">
               <a:ext uri="{FF2B5EF4-FFF2-40B4-BE49-F238E27FC236}">
-                <a16:creationId xmlns:a16="http://schemas.microsoft.com/office/drawing/2014/main" id="{3AE622C1-F2B2-49B2-8FA8-B53143B5A7EB}"/>
+                <a16:creationId xmlns:a16="http://schemas.microsoft.com/office/drawing/2014/main" id="{3A058D3E-AFA4-4E59-AED9-A8626554388B}"/>
               </a:ext>
             </a:extLst>
           </p:cNvPr>
@@ -12161,7 +12169,7 @@
           <p:cNvPr id="8" name="">
             <a:extLst xmlns:a="http://schemas.openxmlformats.org/drawingml/2006/main">
               <a:ext uri="{FF2B5EF4-FFF2-40B4-BE49-F238E27FC236}">
-                <a16:creationId xmlns:a16="http://schemas.microsoft.com/office/drawing/2014/main" id="{013DB672-0819-4BB0-B21F-9FD193598F73}"/>
+                <a16:creationId xmlns:a16="http://schemas.microsoft.com/office/drawing/2014/main" id="{717E2771-3D8E-444F-82F5-25BD904E6F97}"/>
               </a:ext>
             </a:extLst>
           </p:cNvPr>
@@ -12218,7 +12226,7 @@
           <p:cNvPr id="9" name="">
             <a:extLst xmlns:a="http://schemas.openxmlformats.org/drawingml/2006/main">
               <a:ext uri="{FF2B5EF4-FFF2-40B4-BE49-F238E27FC236}">
-                <a16:creationId xmlns:a16="http://schemas.microsoft.com/office/drawing/2014/main" id="{F0F3524A-4C16-48E5-8C3A-C859C24AD55D}"/>
+                <a16:creationId xmlns:a16="http://schemas.microsoft.com/office/drawing/2014/main" id="{1CA82587-095B-4EC6-8005-A65B377D846F}"/>
               </a:ext>
             </a:extLst>
           </p:cNvPr>
@@ -12275,7 +12283,7 @@
           <p:cNvPr id="10" name="">
             <a:extLst xmlns:a="http://schemas.openxmlformats.org/drawingml/2006/main">
               <a:ext uri="{FF2B5EF4-FFF2-40B4-BE49-F238E27FC236}">
-                <a16:creationId xmlns:a16="http://schemas.microsoft.com/office/drawing/2014/main" id="{57F2A348-1BE1-4E40-A5A7-70BE459CEF96}"/>
+                <a16:creationId xmlns:a16="http://schemas.microsoft.com/office/drawing/2014/main" id="{48F0CEFE-F787-41DF-BD4F-33120277F604}"/>
               </a:ext>
             </a:extLst>
           </p:cNvPr>
@@ -12309,7 +12317,7 @@
           <p:cNvPr id="11" name="">
             <a:extLst xmlns:a="http://schemas.openxmlformats.org/drawingml/2006/main">
               <a:ext uri="{FF2B5EF4-FFF2-40B4-BE49-F238E27FC236}">
-                <a16:creationId xmlns:a16="http://schemas.microsoft.com/office/drawing/2014/main" id="{5B9AE990-9CDB-4146-8C64-35A29585D8DC}"/>
+                <a16:creationId xmlns:a16="http://schemas.microsoft.com/office/drawing/2014/main" id="{39171371-89F8-410D-97BE-DB4926AEDDDB}"/>
               </a:ext>
             </a:extLst>
           </p:cNvPr>
@@ -12341,7 +12349,7 @@
           <p:cNvPr id="12" name="">
             <a:extLst xmlns:a="http://schemas.openxmlformats.org/drawingml/2006/main">
               <a:ext uri="{FF2B5EF4-FFF2-40B4-BE49-F238E27FC236}">
-                <a16:creationId xmlns:a16="http://schemas.microsoft.com/office/drawing/2014/main" id="{C0482857-8040-4153-BB82-3C35F28107FD}"/>
+                <a16:creationId xmlns:a16="http://schemas.microsoft.com/office/drawing/2014/main" id="{C62321F5-EE75-422C-A697-FB5BF1E635DE}"/>
               </a:ext>
             </a:extLst>
           </p:cNvPr>
@@ -12398,7 +12406,7 @@
           <p:cNvPr id="13" name="">
             <a:extLst xmlns:a="http://schemas.openxmlformats.org/drawingml/2006/main">
               <a:ext uri="{FF2B5EF4-FFF2-40B4-BE49-F238E27FC236}">
-                <a16:creationId xmlns:a16="http://schemas.microsoft.com/office/drawing/2014/main" id="{7914FA40-F206-4EA4-B69C-DF2AB14C73A9}"/>
+                <a16:creationId xmlns:a16="http://schemas.microsoft.com/office/drawing/2014/main" id="{3A83E133-DC15-476C-AF29-57BD30450811}"/>
               </a:ext>
             </a:extLst>
           </p:cNvPr>
@@ -12455,7 +12463,7 @@
           <p:cNvPr id="14" name="">
             <a:extLst xmlns:a="http://schemas.openxmlformats.org/drawingml/2006/main">
               <a:ext uri="{FF2B5EF4-FFF2-40B4-BE49-F238E27FC236}">
-                <a16:creationId xmlns:a16="http://schemas.microsoft.com/office/drawing/2014/main" id="{7D7EEF44-A889-4D86-9A5C-498F8E937CCA}"/>
+                <a16:creationId xmlns:a16="http://schemas.microsoft.com/office/drawing/2014/main" id="{9616FD21-BB91-4F57-A66C-00A7D99BC116}"/>
               </a:ext>
             </a:extLst>
           </p:cNvPr>
@@ -12489,7 +12497,7 @@
           <p:cNvPr id="15" name="">
             <a:extLst xmlns:a="http://schemas.openxmlformats.org/drawingml/2006/main">
               <a:ext uri="{FF2B5EF4-FFF2-40B4-BE49-F238E27FC236}">
-                <a16:creationId xmlns:a16="http://schemas.microsoft.com/office/drawing/2014/main" id="{DC345446-2B6F-4BA9-90F6-A94E207D589E}"/>
+                <a16:creationId xmlns:a16="http://schemas.microsoft.com/office/drawing/2014/main" id="{E5E543C1-D267-4B21-8B5D-DD8A39A588A7}"/>
               </a:ext>
             </a:extLst>
           </p:cNvPr>
@@ -12521,7 +12529,7 @@
           <p:cNvPr id="16" name="">
             <a:extLst xmlns:a="http://schemas.openxmlformats.org/drawingml/2006/main">
               <a:ext uri="{FF2B5EF4-FFF2-40B4-BE49-F238E27FC236}">
-                <a16:creationId xmlns:a16="http://schemas.microsoft.com/office/drawing/2014/main" id="{FE637004-9A8A-4DE8-81D0-1F32E9098C82}"/>
+                <a16:creationId xmlns:a16="http://schemas.microsoft.com/office/drawing/2014/main" id="{51ADADCA-53DF-4CB7-8B35-645381C482DB}"/>
               </a:ext>
             </a:extLst>
           </p:cNvPr>
@@ -12578,7 +12586,7 @@
           <p:cNvPr id="17" name="">
             <a:extLst xmlns:a="http://schemas.openxmlformats.org/drawingml/2006/main">
               <a:ext uri="{FF2B5EF4-FFF2-40B4-BE49-F238E27FC236}">
-                <a16:creationId xmlns:a16="http://schemas.microsoft.com/office/drawing/2014/main" id="{9A0357DE-3CD3-4CF0-A38D-2179AB1D27C5}"/>
+                <a16:creationId xmlns:a16="http://schemas.microsoft.com/office/drawing/2014/main" id="{41633108-2E62-4CCE-B1F5-4C90DCD6EBAD}"/>
               </a:ext>
             </a:extLst>
           </p:cNvPr>
@@ -12635,7 +12643,7 @@
           <p:cNvPr id="18" name="">
             <a:extLst xmlns:a="http://schemas.openxmlformats.org/drawingml/2006/main">
               <a:ext uri="{FF2B5EF4-FFF2-40B4-BE49-F238E27FC236}">
-                <a16:creationId xmlns:a16="http://schemas.microsoft.com/office/drawing/2014/main" id="{9FE09295-C33C-40DA-BE21-0378E615697E}"/>
+                <a16:creationId xmlns:a16="http://schemas.microsoft.com/office/drawing/2014/main" id="{3EEB2D3D-2C25-46F4-8CEE-0EA52FEECA8B}"/>
               </a:ext>
             </a:extLst>
           </p:cNvPr>
@@ -12669,7 +12677,7 @@
           <p:cNvPr id="19" name="">
             <a:extLst xmlns:a="http://schemas.openxmlformats.org/drawingml/2006/main">
               <a:ext uri="{FF2B5EF4-FFF2-40B4-BE49-F238E27FC236}">
-                <a16:creationId xmlns:a16="http://schemas.microsoft.com/office/drawing/2014/main" id="{FD3F8671-F3FD-47F0-8A1B-4B17ECC47D9F}"/>
+                <a16:creationId xmlns:a16="http://schemas.microsoft.com/office/drawing/2014/main" id="{596C3072-D785-4B1F-95E3-5B5B0D735D21}"/>
               </a:ext>
             </a:extLst>
           </p:cNvPr>
@@ -12701,7 +12709,7 @@
           <p:cNvPr id="20" name="">
             <a:extLst xmlns:a="http://schemas.openxmlformats.org/drawingml/2006/main">
               <a:ext uri="{FF2B5EF4-FFF2-40B4-BE49-F238E27FC236}">
-                <a16:creationId xmlns:a16="http://schemas.microsoft.com/office/drawing/2014/main" id="{A836FEA2-AEE3-49A5-892F-D1719422FDD3}"/>
+                <a16:creationId xmlns:a16="http://schemas.microsoft.com/office/drawing/2014/main" id="{8195A1D2-AE15-41BB-86D1-FCD52FB89353}"/>
               </a:ext>
             </a:extLst>
           </p:cNvPr>
@@ -12758,7 +12766,7 @@
           <p:cNvPr id="21" name="">
             <a:extLst xmlns:a="http://schemas.openxmlformats.org/drawingml/2006/main">
               <a:ext uri="{FF2B5EF4-FFF2-40B4-BE49-F238E27FC236}">
-                <a16:creationId xmlns:a16="http://schemas.microsoft.com/office/drawing/2014/main" id="{5AA61842-8ED0-47C1-A933-C4FC72112A72}"/>
+                <a16:creationId xmlns:a16="http://schemas.microsoft.com/office/drawing/2014/main" id="{D344432C-C119-4B83-8CDC-75AE7D3AA5DD}"/>
               </a:ext>
             </a:extLst>
           </p:cNvPr>
@@ -12815,7 +12823,7 @@
           <p:cNvPr id="22" name="">
             <a:extLst xmlns:a="http://schemas.openxmlformats.org/drawingml/2006/main">
               <a:ext uri="{FF2B5EF4-FFF2-40B4-BE49-F238E27FC236}">
-                <a16:creationId xmlns:a16="http://schemas.microsoft.com/office/drawing/2014/main" id="{4E50A249-3B19-4043-9FDE-226E6191995C}"/>
+                <a16:creationId xmlns:a16="http://schemas.microsoft.com/office/drawing/2014/main" id="{BFFF5A5F-A1DA-4467-9A06-0DCF52C54D01}"/>
               </a:ext>
             </a:extLst>
           </p:cNvPr>
@@ -12870,7 +12878,7 @@
     </p:spTree>
     <p:extLst>
       <p:ext uri="{BB962C8B-B14F-4D97-AF65-F5344CB8AC3E}">
-        <p14:creationId xmlns:p14="http://schemas.microsoft.com/office/powerpoint/2010/main" val="1998367083"/>
+        <p14:creationId xmlns:p14="http://schemas.microsoft.com/office/powerpoint/2010/main" val="1437072574"/>
       </p:ext>
     </p:extLst>
   </p:cSld>
@@ -13071,7 +13079,7 @@
           <p:cNvPr id="22" name="">
             <a:extLst xmlns:a="http://schemas.openxmlformats.org/drawingml/2006/main">
               <a:ext uri="{FF2B5EF4-FFF2-40B4-BE49-F238E27FC236}">
-                <a16:creationId xmlns:a16="http://schemas.microsoft.com/office/drawing/2014/main" id="{46E50B09-BBC6-4570-9639-073D99E02995}"/>
+                <a16:creationId xmlns:a16="http://schemas.microsoft.com/office/drawing/2014/main" id="{EB3CD3EF-8DF2-4276-8A2D-F36768565154}"/>
               </a:ext>
             </a:extLst>
           </p:cNvPr>
@@ -13103,7 +13111,7 @@
           <p:cNvPr id="2" name="">
             <a:extLst xmlns:a="http://schemas.openxmlformats.org/drawingml/2006/main">
               <a:ext uri="{FF2B5EF4-FFF2-40B4-BE49-F238E27FC236}">
-                <a16:creationId xmlns:a16="http://schemas.microsoft.com/office/drawing/2014/main" id="{44F40493-A9E7-4C88-9821-9A0EDD6E98B4}"/>
+                <a16:creationId xmlns:a16="http://schemas.microsoft.com/office/drawing/2014/main" id="{64382B15-F1CD-4E3B-876B-AD040EF7AB8C}"/>
               </a:ext>
             </a:extLst>
           </p:cNvPr>
@@ -13160,7 +13168,7 @@
           <p:cNvPr id="3" name="">
             <a:extLst xmlns:a="http://schemas.openxmlformats.org/drawingml/2006/main">
               <a:ext uri="{FF2B5EF4-FFF2-40B4-BE49-F238E27FC236}">
-                <a16:creationId xmlns:a16="http://schemas.microsoft.com/office/drawing/2014/main" id="{1CFA899A-A006-4F96-BDA2-426E67A3E509}"/>
+                <a16:creationId xmlns:a16="http://schemas.microsoft.com/office/drawing/2014/main" id="{3E84A123-A823-4A78-B6F0-7265C73BE82F}"/>
               </a:ext>
             </a:extLst>
           </p:cNvPr>
@@ -13192,7 +13200,7 @@
           <p:cNvPr id="4" name="">
             <a:extLst xmlns:a="http://schemas.openxmlformats.org/drawingml/2006/main">
               <a:ext uri="{FF2B5EF4-FFF2-40B4-BE49-F238E27FC236}">
-                <a16:creationId xmlns:a16="http://schemas.microsoft.com/office/drawing/2014/main" id="{5BEEFE12-C31C-4447-89FF-41428BBF5F10}"/>
+                <a16:creationId xmlns:a16="http://schemas.microsoft.com/office/drawing/2014/main" id="{803FCD90-0053-4D39-A9FA-33712E51AADB}"/>
               </a:ext>
             </a:extLst>
           </p:cNvPr>
@@ -13249,7 +13257,7 @@
           <p:cNvPr id="5" name="">
             <a:extLst xmlns:a="http://schemas.openxmlformats.org/drawingml/2006/main">
               <a:ext uri="{FF2B5EF4-FFF2-40B4-BE49-F238E27FC236}">
-                <a16:creationId xmlns:a16="http://schemas.microsoft.com/office/drawing/2014/main" id="{D5A96E6D-DC36-44B8-A80E-DFFD7D733364}"/>
+                <a16:creationId xmlns:a16="http://schemas.microsoft.com/office/drawing/2014/main" id="{5ABF3895-5AE3-4E0B-BE65-A833DAD75C79}"/>
               </a:ext>
             </a:extLst>
           </p:cNvPr>
@@ -13306,7 +13314,7 @@
           <p:cNvPr id="6" name="">
             <a:extLst xmlns:a="http://schemas.openxmlformats.org/drawingml/2006/main">
               <a:ext uri="{FF2B5EF4-FFF2-40B4-BE49-F238E27FC236}">
-                <a16:creationId xmlns:a16="http://schemas.microsoft.com/office/drawing/2014/main" id="{126133AD-F597-4801-838C-6B66AE9E2790}"/>
+                <a16:creationId xmlns:a16="http://schemas.microsoft.com/office/drawing/2014/main" id="{E47082B7-67E8-4490-8E37-1299A6394E1C}"/>
               </a:ext>
             </a:extLst>
           </p:cNvPr>
@@ -13363,7 +13371,7 @@
           <p:cNvPr id="7" name="">
             <a:extLst xmlns:a="http://schemas.openxmlformats.org/drawingml/2006/main">
               <a:ext uri="{FF2B5EF4-FFF2-40B4-BE49-F238E27FC236}">
-                <a16:creationId xmlns:a16="http://schemas.microsoft.com/office/drawing/2014/main" id="{6671BDEF-2ACB-433A-823D-B8177AB7B20B}"/>
+                <a16:creationId xmlns:a16="http://schemas.microsoft.com/office/drawing/2014/main" id="{222F1716-021E-4156-A907-376A5A30258E}"/>
               </a:ext>
             </a:extLst>
           </p:cNvPr>
@@ -13395,7 +13403,7 @@
           <p:cNvPr id="8" name="">
             <a:extLst xmlns:a="http://schemas.openxmlformats.org/drawingml/2006/main">
               <a:ext uri="{FF2B5EF4-FFF2-40B4-BE49-F238E27FC236}">
-                <a16:creationId xmlns:a16="http://schemas.microsoft.com/office/drawing/2014/main" id="{A6CABABC-7D20-415E-A95F-0A57B961E5D6}"/>
+                <a16:creationId xmlns:a16="http://schemas.microsoft.com/office/drawing/2014/main" id="{B4D6FB5C-1294-430A-AAA2-EB045DAE605C}"/>
               </a:ext>
             </a:extLst>
           </p:cNvPr>
@@ -13452,7 +13460,7 @@
           <p:cNvPr id="9" name="">
             <a:extLst xmlns:a="http://schemas.openxmlformats.org/drawingml/2006/main">
               <a:ext uri="{FF2B5EF4-FFF2-40B4-BE49-F238E27FC236}">
-                <a16:creationId xmlns:a16="http://schemas.microsoft.com/office/drawing/2014/main" id="{C87E023B-1D01-4937-A671-B3E6C647836D}"/>
+                <a16:creationId xmlns:a16="http://schemas.microsoft.com/office/drawing/2014/main" id="{891C8535-9C2D-47EA-AB91-897B444B8A55}"/>
               </a:ext>
             </a:extLst>
           </p:cNvPr>
@@ -13509,7 +13517,7 @@
           <p:cNvPr id="10" name="">
             <a:extLst xmlns:a="http://schemas.openxmlformats.org/drawingml/2006/main">
               <a:ext uri="{FF2B5EF4-FFF2-40B4-BE49-F238E27FC236}">
-                <a16:creationId xmlns:a16="http://schemas.microsoft.com/office/drawing/2014/main" id="{14BC021F-5E37-404A-A52E-8C4412A0712A}"/>
+                <a16:creationId xmlns:a16="http://schemas.microsoft.com/office/drawing/2014/main" id="{F676755D-8C92-4188-86AC-EA9CF9A0B2D6}"/>
               </a:ext>
             </a:extLst>
           </p:cNvPr>
@@ -13543,7 +13551,7 @@
           <p:cNvPr id="11" name="">
             <a:extLst xmlns:a="http://schemas.openxmlformats.org/drawingml/2006/main">
               <a:ext uri="{FF2B5EF4-FFF2-40B4-BE49-F238E27FC236}">
-                <a16:creationId xmlns:a16="http://schemas.microsoft.com/office/drawing/2014/main" id="{729EC7E3-0D92-431D-9727-BFC63559B8E1}"/>
+                <a16:creationId xmlns:a16="http://schemas.microsoft.com/office/drawing/2014/main" id="{B4E17388-BE2B-4B94-8E2C-D054E916AF42}"/>
               </a:ext>
             </a:extLst>
           </p:cNvPr>
@@ -13575,7 +13583,7 @@
           <p:cNvPr id="12" name="">
             <a:extLst xmlns:a="http://schemas.openxmlformats.org/drawingml/2006/main">
               <a:ext uri="{FF2B5EF4-FFF2-40B4-BE49-F238E27FC236}">
-                <a16:creationId xmlns:a16="http://schemas.microsoft.com/office/drawing/2014/main" id="{ED5A9D3C-D12B-4C97-A71A-93335310E8A2}"/>
+                <a16:creationId xmlns:a16="http://schemas.microsoft.com/office/drawing/2014/main" id="{4DC2DA1B-2893-4013-A31C-34DCE919EDFE}"/>
               </a:ext>
             </a:extLst>
           </p:cNvPr>
@@ -13632,7 +13640,7 @@
           <p:cNvPr id="13" name="">
             <a:extLst xmlns:a="http://schemas.openxmlformats.org/drawingml/2006/main">
               <a:ext uri="{FF2B5EF4-FFF2-40B4-BE49-F238E27FC236}">
-                <a16:creationId xmlns:a16="http://schemas.microsoft.com/office/drawing/2014/main" id="{0296E8DC-8A0A-4C71-A1E9-F0F7E5F11568}"/>
+                <a16:creationId xmlns:a16="http://schemas.microsoft.com/office/drawing/2014/main" id="{C654F15E-ACC1-4873-B906-09C36189C4F1}"/>
               </a:ext>
             </a:extLst>
           </p:cNvPr>
@@ -13689,7 +13697,7 @@
           <p:cNvPr id="14" name="">
             <a:extLst xmlns:a="http://schemas.openxmlformats.org/drawingml/2006/main">
               <a:ext uri="{FF2B5EF4-FFF2-40B4-BE49-F238E27FC236}">
-                <a16:creationId xmlns:a16="http://schemas.microsoft.com/office/drawing/2014/main" id="{D234C458-37D0-4656-9637-FB7FA16D684F}"/>
+                <a16:creationId xmlns:a16="http://schemas.microsoft.com/office/drawing/2014/main" id="{CCBB44DF-E23F-44BD-AD02-2C35971A5018}"/>
               </a:ext>
             </a:extLst>
           </p:cNvPr>
@@ -13723,7 +13731,7 @@
           <p:cNvPr id="15" name="">
             <a:extLst xmlns:a="http://schemas.openxmlformats.org/drawingml/2006/main">
               <a:ext uri="{FF2B5EF4-FFF2-40B4-BE49-F238E27FC236}">
-                <a16:creationId xmlns:a16="http://schemas.microsoft.com/office/drawing/2014/main" id="{AD7D1404-760A-41EB-9FBB-1CE96157E7AA}"/>
+                <a16:creationId xmlns:a16="http://schemas.microsoft.com/office/drawing/2014/main" id="{26CC60D1-B596-4A29-9AA4-DB4D8BB0FB2E}"/>
               </a:ext>
             </a:extLst>
           </p:cNvPr>
@@ -13755,7 +13763,7 @@
           <p:cNvPr id="16" name="">
             <a:extLst xmlns:a="http://schemas.openxmlformats.org/drawingml/2006/main">
               <a:ext uri="{FF2B5EF4-FFF2-40B4-BE49-F238E27FC236}">
-                <a16:creationId xmlns:a16="http://schemas.microsoft.com/office/drawing/2014/main" id="{1A4C250E-A866-4D6D-9EFC-D7B4FE6C3078}"/>
+                <a16:creationId xmlns:a16="http://schemas.microsoft.com/office/drawing/2014/main" id="{AA78BBEF-8390-47AB-B503-924C54A88ADE}"/>
               </a:ext>
             </a:extLst>
           </p:cNvPr>
@@ -13812,7 +13820,7 @@
           <p:cNvPr id="17" name="">
             <a:extLst xmlns:a="http://schemas.openxmlformats.org/drawingml/2006/main">
               <a:ext uri="{FF2B5EF4-FFF2-40B4-BE49-F238E27FC236}">
-                <a16:creationId xmlns:a16="http://schemas.microsoft.com/office/drawing/2014/main" id="{EE1E3B9D-A1C6-4540-8D61-F9F59B236827}"/>
+                <a16:creationId xmlns:a16="http://schemas.microsoft.com/office/drawing/2014/main" id="{E34EC028-260A-4849-8F00-D55AA9D47CF1}"/>
               </a:ext>
             </a:extLst>
           </p:cNvPr>
@@ -13869,7 +13877,7 @@
           <p:cNvPr id="18" name="">
             <a:extLst xmlns:a="http://schemas.openxmlformats.org/drawingml/2006/main">
               <a:ext uri="{FF2B5EF4-FFF2-40B4-BE49-F238E27FC236}">
-                <a16:creationId xmlns:a16="http://schemas.microsoft.com/office/drawing/2014/main" id="{9617A8A5-186E-475C-9830-E9310E8A6779}"/>
+                <a16:creationId xmlns:a16="http://schemas.microsoft.com/office/drawing/2014/main" id="{009BC390-A632-4B07-93A0-5FA219CD3002}"/>
               </a:ext>
             </a:extLst>
           </p:cNvPr>
@@ -13903,7 +13911,7 @@
           <p:cNvPr id="19" name="">
             <a:extLst xmlns:a="http://schemas.openxmlformats.org/drawingml/2006/main">
               <a:ext uri="{FF2B5EF4-FFF2-40B4-BE49-F238E27FC236}">
-                <a16:creationId xmlns:a16="http://schemas.microsoft.com/office/drawing/2014/main" id="{75D988D4-D162-47D0-9DA4-508253ACC673}"/>
+                <a16:creationId xmlns:a16="http://schemas.microsoft.com/office/drawing/2014/main" id="{BA0A5F42-36F5-47B7-B57B-5B9DD0FEA582}"/>
               </a:ext>
             </a:extLst>
           </p:cNvPr>
@@ -13935,7 +13943,7 @@
           <p:cNvPr id="20" name="">
             <a:extLst xmlns:a="http://schemas.openxmlformats.org/drawingml/2006/main">
               <a:ext uri="{FF2B5EF4-FFF2-40B4-BE49-F238E27FC236}">
-                <a16:creationId xmlns:a16="http://schemas.microsoft.com/office/drawing/2014/main" id="{3A236558-D9CC-478D-B338-8A7DCA36DF72}"/>
+                <a16:creationId xmlns:a16="http://schemas.microsoft.com/office/drawing/2014/main" id="{60BC65DB-8B03-4FBF-993E-8A1760D2FE71}"/>
               </a:ext>
             </a:extLst>
           </p:cNvPr>
@@ -13992,7 +14000,7 @@
           <p:cNvPr id="21" name="">
             <a:extLst xmlns:a="http://schemas.openxmlformats.org/drawingml/2006/main">
               <a:ext uri="{FF2B5EF4-FFF2-40B4-BE49-F238E27FC236}">
-                <a16:creationId xmlns:a16="http://schemas.microsoft.com/office/drawing/2014/main" id="{CA354A98-969D-41DA-A3F6-277156A2BFBB}"/>
+                <a16:creationId xmlns:a16="http://schemas.microsoft.com/office/drawing/2014/main" id="{077659E9-8CF3-40CD-B4C1-2767D1E3EA9A}"/>
               </a:ext>
             </a:extLst>
           </p:cNvPr>
@@ -14047,7 +14055,7 @@
     </p:spTree>
     <p:extLst>
       <p:ext uri="{BB962C8B-B14F-4D97-AF65-F5344CB8AC3E}">
-        <p14:creationId xmlns:p14="http://schemas.microsoft.com/office/powerpoint/2010/main" val="1432393913"/>
+        <p14:creationId xmlns:p14="http://schemas.microsoft.com/office/powerpoint/2010/main" val="1402772833"/>
       </p:ext>
     </p:extLst>
   </p:cSld>
